--- a/사업설명회.pptx
+++ b/사업설명회.pptx
@@ -19,9 +19,10 @@
     <p:sldId id="267" r:id="rId13"/>
     <p:sldId id="268" r:id="rId14"/>
     <p:sldId id="269" r:id="rId15"/>
+    <p:sldId id="270" r:id="rId16"/>
   </p:sldIdLst>
   <p:notesMasterIdLst>
-    <p:notesMasterId r:id="rId16"/>
+    <p:notesMasterId r:id="rId17"/>
   </p:notesMasterIdLst>
   <p:sldSz cx="12191695" cy="6858000"/>
   <p:notesSz cx="6858000" cy="12191695"/>
@@ -979,6 +980,94 @@
             <a:fld id="{F7021451-1387-4CA6-816F-3879F97B5CBC}" type="slidenum">
               <a:rPr lang="en-US"/>
               <a:t>14</a:t>
+            </a:fld>
+            <a:endParaRPr lang="en-US"/>
+          </a:p>
+        </p:txBody>
+      </p:sp>
+    </p:spTree>
+    <p:extLst>
+      <p:ext uri="{BB962C8B-B14F-4D97-AF65-F5344CB8AC3E}">
+        <p14:creationId xmlns:p14="http://schemas.microsoft.com/office/powerpoint/2010/main" val="1024086991"/>
+      </p:ext>
+    </p:extLst>
+  </p:cSld>
+  <p:clrMapOvr>
+    <a:masterClrMapping/>
+  </p:clrMapOvr>
+</p:notes>
+</file>
+
+<file path=ppt/notesSlides/notesSlide15.xml><?xml version="1.0" encoding="utf-8"?>
+<p:notes xmlns:a="http://schemas.openxmlformats.org/drawingml/2006/main" xmlns:r="http://schemas.openxmlformats.org/officeDocument/2006/relationships" xmlns:p="http://schemas.openxmlformats.org/presentationml/2006/main">
+  <p:cSld>
+    <p:spTree>
+      <p:nvGrpSpPr>
+        <p:cNvPr id="1" name=""/>
+        <p:cNvGrpSpPr/>
+        <p:nvPr/>
+      </p:nvGrpSpPr>
+      <p:grpSpPr>
+        <a:xfrm>
+          <a:off x="0" y="0"/>
+          <a:ext cx="0" cy="0"/>
+          <a:chOff x="0" y="0"/>
+          <a:chExt cx="0" cy="0"/>
+        </a:xfrm>
+      </p:grpSpPr>
+      <p:sp>
+        <p:nvSpPr>
+          <p:cNvPr id="2" name="Slide Image Placeholder 1"/>
+          <p:cNvSpPr>
+            <a:spLocks noGrp="1" noRot="1" noChangeAspect="1"/>
+          </p:cNvSpPr>
+          <p:nvPr>
+            <p:ph type="sldImg"/>
+          </p:nvPr>
+        </p:nvSpPr>
+        <p:spPr/>
+      </p:sp>
+      <p:sp>
+        <p:nvSpPr>
+          <p:cNvPr id="3" name="Notes Placeholder 2"/>
+          <p:cNvSpPr>
+            <a:spLocks noGrp="1"/>
+          </p:cNvSpPr>
+          <p:nvPr>
+            <p:ph type="body" idx="1"/>
+          </p:nvPr>
+        </p:nvSpPr>
+        <p:spPr/>
+        <p:txBody>
+          <a:bodyPr/>
+          <a:lstStyle/>
+          <a:p>
+            <a:r>
+              <a:rPr lang="en-US" dirty="0"/>
+              <a:t/>
+            </a:r>
+            <a:endParaRPr lang="en-US" dirty="0"/>
+          </a:p>
+        </p:txBody>
+      </p:sp>
+      <p:sp>
+        <p:nvSpPr>
+          <p:cNvPr id="4" name="Slide Number Placeholder 3"/>
+          <p:cNvSpPr>
+            <a:spLocks noGrp="1"/>
+          </p:cNvSpPr>
+          <p:nvPr>
+            <p:ph type="sldNum" sz="quarter" idx="10"/>
+          </p:nvPr>
+        </p:nvSpPr>
+        <p:spPr/>
+        <p:txBody>
+          <a:bodyPr/>
+          <a:lstStyle/>
+          <a:p>
+            <a:fld id="{F7021451-1387-4CA6-816F-3879F97B5CBC}" type="slidenum">
+              <a:rPr lang="en-US"/>
+              <a:t>15</a:t>
             </a:fld>
             <a:endParaRPr lang="en-US"/>
           </a:p>
@@ -2701,7 +2790,7 @@
     <p:bg>
       <p:bgPr>
         <a:solidFill>
-          <a:srgbClr val="12141B"/>
+          <a:srgbClr val="FFFFFF"/>
         </a:solidFill>
       </p:bgPr>
     </p:bg>
@@ -2727,16 +2816,14 @@
         </p:nvSpPr>
         <p:spPr>
           <a:xfrm>
-            <a:off x="7955280" y="-2194560"/>
-            <a:ext cx="5943600" cy="5943600"/>
-          </a:xfrm>
-          <a:prstGeom prst="ellipse">
+            <a:off x="0" y="0"/>
+            <a:ext cx="12191695" cy="146304"/>
+          </a:xfrm>
+          <a:prstGeom prst="rect">
             <a:avLst/>
           </a:prstGeom>
           <a:solidFill>
-            <a:srgbClr val="2A2350">
-              <a:alpha val="45000"/>
-            </a:srgbClr>
+            <a:srgbClr val="FF7A00"/>
           </a:solidFill>
           <a:ln/>
         </p:spPr>
@@ -2768,13 +2855,13 @@
             <a:r>
               <a:rPr lang="en-US" sz="1100" b="1" spc="200" kern="0" dirty="0">
                 <a:solidFill>
-                  <a:srgbClr val="FECA0A"/>
-                </a:solidFill>
-                <a:latin typeface="Malgun Gothic" pitchFamily="34" charset="0"/>
-                <a:ea typeface="Malgun Gothic" pitchFamily="34" charset="-122"/>
-                <a:cs typeface="Malgun Gothic" pitchFamily="34" charset="-120"/>
-              </a:rPr>
-              <a:t>가맹 강점</a:t>
+                  <a:srgbClr val="FF7A00"/>
+                </a:solidFill>
+                <a:latin typeface="Malgun Gothic" pitchFamily="34" charset="0"/>
+                <a:ea typeface="Malgun Gothic" pitchFamily="34" charset="-122"/>
+                <a:cs typeface="Malgun Gothic" pitchFamily="34" charset="-120"/>
+              </a:rPr>
+              <a:t>차별점</a:t>
             </a:r>
             <a:endParaRPr lang="en-US" sz="1100" dirty="0"/>
           </a:p>
@@ -2810,13 +2897,13 @@
             <a:r>
               <a:rPr lang="en-US" sz="3200" b="1" dirty="0">
                 <a:solidFill>
-                  <a:srgbClr val="FFFFFF"/>
-                </a:solidFill>
-                <a:latin typeface="Malgun Gothic" pitchFamily="34" charset="0"/>
-                <a:ea typeface="Malgun Gothic" pitchFamily="34" charset="-122"/>
-                <a:cs typeface="Malgun Gothic" pitchFamily="34" charset="-120"/>
-              </a:rPr>
-              <a:t>검증된 시스템을 </a:t>
+                  <a:srgbClr val="151515"/>
+                </a:solidFill>
+                <a:latin typeface="Malgun Gothic" pitchFamily="34" charset="0"/>
+                <a:ea typeface="Malgun Gothic" pitchFamily="34" charset="-122"/>
+                <a:cs typeface="Malgun Gothic" pitchFamily="34" charset="-120"/>
+              </a:rPr>
+              <a:t>왜 </a:t>
             </a:r>
             <a:pPr indent="0" marL="0">
               <a:lnSpc>
@@ -2827,13 +2914,30 @@
             <a:r>
               <a:rPr lang="en-US" sz="3200" b="1" dirty="0">
                 <a:solidFill>
-                  <a:srgbClr val="FECA0A"/>
-                </a:solidFill>
-                <a:latin typeface="Malgun Gothic" pitchFamily="34" charset="0"/>
-                <a:ea typeface="Malgun Gothic" pitchFamily="34" charset="-122"/>
-                <a:cs typeface="Malgun Gothic" pitchFamily="34" charset="-120"/>
-              </a:rPr>
-              <a:t>그대로</a:t>
+                  <a:srgbClr val="FF7A00"/>
+                </a:solidFill>
+                <a:latin typeface="Malgun Gothic" pitchFamily="34" charset="0"/>
+                <a:ea typeface="Malgun Gothic" pitchFamily="34" charset="-122"/>
+                <a:cs typeface="Malgun Gothic" pitchFamily="34" charset="-120"/>
+              </a:rPr>
+              <a:t>아이블레스</a:t>
+            </a:r>
+            <a:pPr indent="0" marL="0">
+              <a:lnSpc>
+                <a:spcPct val="105000"/>
+              </a:lnSpc>
+              <a:buNone/>
+            </a:pPr>
+            <a:r>
+              <a:rPr lang="en-US" sz="3200" b="1" dirty="0">
+                <a:solidFill>
+                  <a:srgbClr val="151515"/>
+                </a:solidFill>
+                <a:latin typeface="Malgun Gothic" pitchFamily="34" charset="0"/>
+                <a:ea typeface="Malgun Gothic" pitchFamily="34" charset="-122"/>
+                <a:cs typeface="Malgun Gothic" pitchFamily="34" charset="-120"/>
+              </a:rPr>
+              <a:t>인가 — 다른 점 6가지</a:t>
             </a:r>
             <a:endParaRPr lang="en-US" sz="3200" dirty="0"/>
           </a:p>
@@ -2847,23 +2951,30 @@
         </p:nvSpPr>
         <p:spPr>
           <a:xfrm>
-            <a:off x="777240" y="2468880"/>
-            <a:ext cx="2467280" cy="1920240"/>
+            <a:off x="777240" y="2240280"/>
+            <a:ext cx="3375050" cy="1600200"/>
           </a:xfrm>
           <a:prstGeom prst="roundRect">
             <a:avLst>
-              <a:gd name="adj" fmla="val 4286"/>
+              <a:gd name="adj" fmla="val 5143"/>
             </a:avLst>
           </a:prstGeom>
           <a:solidFill>
-            <a:srgbClr val="20232E"/>
+            <a:srgbClr val="FFFFFF"/>
           </a:solidFill>
           <a:ln w="12700">
             <a:solidFill>
-              <a:srgbClr val="33384A"/>
+              <a:srgbClr val="E7E7E7"/>
             </a:solidFill>
             <a:prstDash val="solid"/>
           </a:ln>
+          <a:effectLst>
+            <a:outerShdw sx="100000" sy="100000" kx="0" ky="0" algn="bl" rotWithShape="0" blurRad="101600" dist="25400" dir="5400000">
+              <a:srgbClr val="BFBFBF">
+                <a:alpha val="35000"/>
+              </a:srgbClr>
+            </a:outerShdw>
+          </a:effectLst>
         </p:spPr>
       </p:sp>
       <p:sp>
@@ -2874,34 +2985,34 @@
         </p:nvSpPr>
         <p:spPr>
           <a:xfrm>
-            <a:off x="1014984" y="2670048"/>
-            <a:ext cx="1991792" cy="365760"/>
-          </a:xfrm>
-          <a:prstGeom prst="rect">
-            <a:avLst/>
-          </a:prstGeom>
-          <a:noFill/>
-          <a:ln/>
-        </p:spPr>
-        <p:txBody>
-          <a:bodyPr wrap="square" rtlCol="0" anchor="ctr"/>
-          <a:lstStyle/>
-          <a:p>
-            <a:pPr indent="0" marL="0">
-              <a:buNone/>
-            </a:pPr>
-            <a:r>
-              <a:rPr lang="en-US" sz="1900" b="1" dirty="0">
-                <a:solidFill>
-                  <a:srgbClr val="FECA0A"/>
-                </a:solidFill>
-                <a:latin typeface="Malgun Gothic" pitchFamily="34" charset="0"/>
-                <a:ea typeface="Malgun Gothic" pitchFamily="34" charset="-122"/>
-                <a:cs typeface="Malgun Gothic" pitchFamily="34" charset="-120"/>
-              </a:rPr>
-              <a:t>01</a:t>
-            </a:r>
-            <a:endParaRPr lang="en-US" sz="1900" dirty="0"/>
+            <a:off x="1014984" y="2441448"/>
+            <a:ext cx="2899562" cy="365760"/>
+          </a:xfrm>
+          <a:prstGeom prst="rect">
+            <a:avLst/>
+          </a:prstGeom>
+          <a:noFill/>
+          <a:ln/>
+        </p:spPr>
+        <p:txBody>
+          <a:bodyPr wrap="square" rtlCol="0" anchor="ctr"/>
+          <a:lstStyle/>
+          <a:p>
+            <a:pPr indent="0" marL="0">
+              <a:buNone/>
+            </a:pPr>
+            <a:r>
+              <a:rPr lang="en-US" sz="1450" b="1" dirty="0">
+                <a:solidFill>
+                  <a:srgbClr val="151515"/>
+                </a:solidFill>
+                <a:latin typeface="Malgun Gothic" pitchFamily="34" charset="0"/>
+                <a:ea typeface="Malgun Gothic" pitchFamily="34" charset="-122"/>
+                <a:cs typeface="Malgun Gothic" pitchFamily="34" charset="-120"/>
+              </a:rPr>
+              <a:t>① 실력에서 출발</a:t>
+            </a:r>
+            <a:endParaRPr lang="en-US" sz="1450" dirty="0"/>
           </a:p>
         </p:txBody>
       </p:sp>
@@ -2913,47 +3024,8 @@
         </p:nvSpPr>
         <p:spPr>
           <a:xfrm>
-            <a:off x="1014984" y="3127248"/>
-            <a:ext cx="1991792" cy="365760"/>
-          </a:xfrm>
-          <a:prstGeom prst="rect">
-            <a:avLst/>
-          </a:prstGeom>
-          <a:noFill/>
-          <a:ln/>
-        </p:spPr>
-        <p:txBody>
-          <a:bodyPr wrap="square" rtlCol="0" anchor="ctr"/>
-          <a:lstStyle/>
-          <a:p>
-            <a:pPr indent="0" marL="0">
-              <a:buNone/>
-            </a:pPr>
-            <a:r>
-              <a:rPr lang="en-US" sz="1450" b="1" dirty="0">
-                <a:solidFill>
-                  <a:srgbClr val="FFFFFF"/>
-                </a:solidFill>
-                <a:latin typeface="Malgun Gothic" pitchFamily="34" charset="0"/>
-                <a:ea typeface="Malgun Gothic" pitchFamily="34" charset="-122"/>
-                <a:cs typeface="Malgun Gothic" pitchFamily="34" charset="-120"/>
-              </a:rPr>
-              <a:t>검증된 커리큘럼</a:t>
-            </a:r>
-            <a:endParaRPr lang="en-US" sz="1450" dirty="0"/>
-          </a:p>
-        </p:txBody>
-      </p:sp>
-      <p:sp>
-        <p:nvSpPr>
-          <p:cNvPr id="8" name="Text 6"/>
-          <p:cNvSpPr/>
-          <p:nvPr/>
-        </p:nvSpPr>
-        <p:spPr>
-          <a:xfrm>
-            <a:off x="1014984" y="3547872"/>
-            <a:ext cx="1991792" cy="676656"/>
+            <a:off x="1014984" y="2862072"/>
+            <a:ext cx="2899562" cy="813816"/>
           </a:xfrm>
           <a:prstGeom prst="rect">
             <a:avLst/>
@@ -2974,13 +3046,13 @@
             <a:r>
               <a:rPr lang="en-US" sz="1150" dirty="0">
                 <a:solidFill>
-                  <a:srgbClr val="C7C7D4"/>
-                </a:solidFill>
-                <a:latin typeface="Malgun Gothic" pitchFamily="34" charset="0"/>
-                <a:ea typeface="Malgun Gothic" pitchFamily="34" charset="-122"/>
-                <a:cs typeface="Malgun Gothic" pitchFamily="34" charset="-120"/>
-              </a:rPr>
-              <a:t>레벨링·4대영역·공인시험 연계</a:t>
+                  <a:srgbClr val="494B4A"/>
+                </a:solidFill>
+                <a:latin typeface="Malgun Gothic" pitchFamily="34" charset="0"/>
+                <a:ea typeface="Malgun Gothic" pitchFamily="34" charset="-122"/>
+                <a:cs typeface="Malgun Gothic" pitchFamily="34" charset="-120"/>
+              </a:rPr>
+              <a:t>학년 일괄 진도가 아니라 진단 기반 1:1 정밀 레벨링</a:t>
             </a:r>
             <a:endParaRPr lang="en-US" sz="1150" dirty="0"/>
           </a:p>
@@ -2988,30 +3060,80 @@
       </p:sp>
       <p:sp>
         <p:nvSpPr>
-          <p:cNvPr id="9" name="Shape 7"/>
-          <p:cNvSpPr/>
-          <p:nvPr/>
-        </p:nvSpPr>
-        <p:spPr>
-          <a:xfrm>
-            <a:off x="3500552" y="2468880"/>
-            <a:ext cx="2467280" cy="1920240"/>
+          <p:cNvPr id="8" name="Shape 6"/>
+          <p:cNvSpPr/>
+          <p:nvPr/>
+        </p:nvSpPr>
+        <p:spPr>
+          <a:xfrm>
+            <a:off x="4408322" y="2240280"/>
+            <a:ext cx="3375050" cy="1600200"/>
           </a:xfrm>
           <a:prstGeom prst="roundRect">
             <a:avLst>
-              <a:gd name="adj" fmla="val 4286"/>
+              <a:gd name="adj" fmla="val 5143"/>
             </a:avLst>
           </a:prstGeom>
           <a:solidFill>
-            <a:srgbClr val="20232E"/>
+            <a:srgbClr val="FFFFFF"/>
           </a:solidFill>
           <a:ln w="12700">
             <a:solidFill>
-              <a:srgbClr val="33384A"/>
+              <a:srgbClr val="E7E7E7"/>
             </a:solidFill>
             <a:prstDash val="solid"/>
           </a:ln>
-        </p:spPr>
+          <a:effectLst>
+            <a:outerShdw sx="100000" sy="100000" kx="0" ky="0" algn="bl" rotWithShape="0" blurRad="101600" dist="25400" dir="5400000">
+              <a:srgbClr val="BFBFBF">
+                <a:alpha val="35000"/>
+              </a:srgbClr>
+            </a:outerShdw>
+          </a:effectLst>
+        </p:spPr>
+      </p:sp>
+      <p:sp>
+        <p:nvSpPr>
+          <p:cNvPr id="9" name="Text 7"/>
+          <p:cNvSpPr/>
+          <p:nvPr/>
+        </p:nvSpPr>
+        <p:spPr>
+          <a:xfrm>
+            <a:off x="4646066" y="2441448"/>
+            <a:ext cx="2899562" cy="310896"/>
+          </a:xfrm>
+          <a:prstGeom prst="roundRect">
+            <a:avLst>
+              <a:gd name="adj" fmla="val 50000"/>
+            </a:avLst>
+          </a:prstGeom>
+          <a:solidFill>
+            <a:srgbClr val="FF7A00"/>
+          </a:solidFill>
+          <a:ln/>
+        </p:spPr>
+        <p:txBody>
+          <a:bodyPr wrap="square" rtlCol="0" anchor="ctr"/>
+          <a:lstStyle/>
+          <a:p>
+            <a:pPr algn="ctr" indent="0" marL="0">
+              <a:buNone/>
+            </a:pPr>
+            <a:r>
+              <a:rPr lang="en-US" sz="1050" b="1" dirty="0">
+                <a:solidFill>
+                  <a:srgbClr val="FFFFFF"/>
+                </a:solidFill>
+                <a:latin typeface="Malgun Gothic" pitchFamily="34" charset="0"/>
+                <a:ea typeface="Malgun Gothic" pitchFamily="34" charset="-122"/>
+                <a:cs typeface="Malgun Gothic" pitchFamily="34" charset="-120"/>
+              </a:rPr>
+              <a:t>핵심</a:t>
+            </a:r>
+            <a:endParaRPr lang="en-US" sz="1050" dirty="0"/>
+          </a:p>
+        </p:txBody>
       </p:sp>
       <p:sp>
         <p:nvSpPr>
@@ -3021,34 +3143,34 @@
         </p:nvSpPr>
         <p:spPr>
           <a:xfrm>
-            <a:off x="3738296" y="2670048"/>
-            <a:ext cx="1991792" cy="365760"/>
-          </a:xfrm>
-          <a:prstGeom prst="rect">
-            <a:avLst/>
-          </a:prstGeom>
-          <a:noFill/>
-          <a:ln/>
-        </p:spPr>
-        <p:txBody>
-          <a:bodyPr wrap="square" rtlCol="0" anchor="ctr"/>
-          <a:lstStyle/>
-          <a:p>
-            <a:pPr indent="0" marL="0">
-              <a:buNone/>
-            </a:pPr>
-            <a:r>
-              <a:rPr lang="en-US" sz="1900" b="1" dirty="0">
-                <a:solidFill>
-                  <a:srgbClr val="FECA0A"/>
-                </a:solidFill>
-                <a:latin typeface="Malgun Gothic" pitchFamily="34" charset="0"/>
-                <a:ea typeface="Malgun Gothic" pitchFamily="34" charset="-122"/>
-                <a:cs typeface="Malgun Gothic" pitchFamily="34" charset="-120"/>
-              </a:rPr>
-              <a:t>02</a:t>
-            </a:r>
-            <a:endParaRPr lang="en-US" sz="1900" dirty="0"/>
+            <a:off x="4646066" y="2898648"/>
+            <a:ext cx="2899562" cy="365760"/>
+          </a:xfrm>
+          <a:prstGeom prst="rect">
+            <a:avLst/>
+          </a:prstGeom>
+          <a:noFill/>
+          <a:ln/>
+        </p:spPr>
+        <p:txBody>
+          <a:bodyPr wrap="square" rtlCol="0" anchor="ctr"/>
+          <a:lstStyle/>
+          <a:p>
+            <a:pPr indent="0" marL="0">
+              <a:buNone/>
+            </a:pPr>
+            <a:r>
+              <a:rPr lang="en-US" sz="1450" b="1" dirty="0">
+                <a:solidFill>
+                  <a:srgbClr val="151515"/>
+                </a:solidFill>
+                <a:latin typeface="Malgun Gothic" pitchFamily="34" charset="0"/>
+                <a:ea typeface="Malgun Gothic" pitchFamily="34" charset="-122"/>
+                <a:cs typeface="Malgun Gothic" pitchFamily="34" charset="-120"/>
+              </a:rPr>
+              <a:t>② 동기과학 설계</a:t>
+            </a:r>
+            <a:endParaRPr lang="en-US" sz="1450" dirty="0"/>
           </a:p>
         </p:txBody>
       </p:sp>
@@ -3060,47 +3182,8 @@
         </p:nvSpPr>
         <p:spPr>
           <a:xfrm>
-            <a:off x="3738296" y="3127248"/>
-            <a:ext cx="1991792" cy="365760"/>
-          </a:xfrm>
-          <a:prstGeom prst="rect">
-            <a:avLst/>
-          </a:prstGeom>
-          <a:noFill/>
-          <a:ln/>
-        </p:spPr>
-        <p:txBody>
-          <a:bodyPr wrap="square" rtlCol="0" anchor="ctr"/>
-          <a:lstStyle/>
-          <a:p>
-            <a:pPr indent="0" marL="0">
-              <a:buNone/>
-            </a:pPr>
-            <a:r>
-              <a:rPr lang="en-US" sz="1450" b="1" dirty="0">
-                <a:solidFill>
-                  <a:srgbClr val="FFFFFF"/>
-                </a:solidFill>
-                <a:latin typeface="Malgun Gothic" pitchFamily="34" charset="0"/>
-                <a:ea typeface="Malgun Gothic" pitchFamily="34" charset="-122"/>
-                <a:cs typeface="Malgun Gothic" pitchFamily="34" charset="-120"/>
-              </a:rPr>
-              <a:t>교재·콘텐츠</a:t>
-            </a:r>
-            <a:endParaRPr lang="en-US" sz="1450" dirty="0"/>
-          </a:p>
-        </p:txBody>
-      </p:sp>
-      <p:sp>
-        <p:nvSpPr>
-          <p:cNvPr id="12" name="Text 10"/>
-          <p:cNvSpPr/>
-          <p:nvPr/>
-        </p:nvSpPr>
-        <p:spPr>
-          <a:xfrm>
-            <a:off x="3738296" y="3547872"/>
-            <a:ext cx="1991792" cy="676656"/>
+            <a:off x="4646066" y="3319272"/>
+            <a:ext cx="2899562" cy="356616"/>
           </a:xfrm>
           <a:prstGeom prst="rect">
             <a:avLst/>
@@ -3121,13 +3204,13 @@
             <a:r>
               <a:rPr lang="en-US" sz="1150" dirty="0">
                 <a:solidFill>
-                  <a:srgbClr val="C7C7D4"/>
-                </a:solidFill>
-                <a:latin typeface="Malgun Gothic" pitchFamily="34" charset="0"/>
-                <a:ea typeface="Malgun Gothic" pitchFamily="34" charset="-122"/>
-                <a:cs typeface="Malgun Gothic" pitchFamily="34" charset="-120"/>
-              </a:rPr>
-              <a:t>단계별 자체 개발 교재·앱</a:t>
+                  <a:srgbClr val="494B4A"/>
+                </a:solidFill>
+                <a:latin typeface="Malgun Gothic" pitchFamily="34" charset="0"/>
+                <a:ea typeface="Malgun Gothic" pitchFamily="34" charset="-122"/>
+                <a:cs typeface="Malgun Gothic" pitchFamily="34" charset="-120"/>
+              </a:rPr>
+              <a:t>자기결정이론(SDT)으로 ‘스스로 하는’ 동기까지 설계</a:t>
             </a:r>
             <a:endParaRPr lang="en-US" sz="1150" dirty="0"/>
           </a:p>
@@ -3135,30 +3218,80 @@
       </p:sp>
       <p:sp>
         <p:nvSpPr>
-          <p:cNvPr id="13" name="Shape 11"/>
-          <p:cNvSpPr/>
-          <p:nvPr/>
-        </p:nvSpPr>
-        <p:spPr>
-          <a:xfrm>
-            <a:off x="6223864" y="2468880"/>
-            <a:ext cx="2467280" cy="1920240"/>
+          <p:cNvPr id="12" name="Shape 10"/>
+          <p:cNvSpPr/>
+          <p:nvPr/>
+        </p:nvSpPr>
+        <p:spPr>
+          <a:xfrm>
+            <a:off x="8039405" y="2240280"/>
+            <a:ext cx="3375050" cy="1600200"/>
           </a:xfrm>
           <a:prstGeom prst="roundRect">
             <a:avLst>
-              <a:gd name="adj" fmla="val 4286"/>
+              <a:gd name="adj" fmla="val 5143"/>
             </a:avLst>
           </a:prstGeom>
           <a:solidFill>
-            <a:srgbClr val="20232E"/>
+            <a:srgbClr val="FFFFFF"/>
           </a:solidFill>
           <a:ln w="12700">
             <a:solidFill>
-              <a:srgbClr val="33384A"/>
+              <a:srgbClr val="E7E7E7"/>
             </a:solidFill>
             <a:prstDash val="solid"/>
           </a:ln>
-        </p:spPr>
+          <a:effectLst>
+            <a:outerShdw sx="100000" sy="100000" kx="0" ky="0" algn="bl" rotWithShape="0" blurRad="101600" dist="25400" dir="5400000">
+              <a:srgbClr val="BFBFBF">
+                <a:alpha val="35000"/>
+              </a:srgbClr>
+            </a:outerShdw>
+          </a:effectLst>
+        </p:spPr>
+      </p:sp>
+      <p:sp>
+        <p:nvSpPr>
+          <p:cNvPr id="13" name="Text 11"/>
+          <p:cNvSpPr/>
+          <p:nvPr/>
+        </p:nvSpPr>
+        <p:spPr>
+          <a:xfrm>
+            <a:off x="8277149" y="2441448"/>
+            <a:ext cx="2899562" cy="310896"/>
+          </a:xfrm>
+          <a:prstGeom prst="roundRect">
+            <a:avLst>
+              <a:gd name="adj" fmla="val 50000"/>
+            </a:avLst>
+          </a:prstGeom>
+          <a:solidFill>
+            <a:srgbClr val="FF7A00"/>
+          </a:solidFill>
+          <a:ln/>
+        </p:spPr>
+        <p:txBody>
+          <a:bodyPr wrap="square" rtlCol="0" anchor="ctr"/>
+          <a:lstStyle/>
+          <a:p>
+            <a:pPr algn="ctr" indent="0" marL="0">
+              <a:buNone/>
+            </a:pPr>
+            <a:r>
+              <a:rPr lang="en-US" sz="1050" b="1" dirty="0">
+                <a:solidFill>
+                  <a:srgbClr val="FFFFFF"/>
+                </a:solidFill>
+                <a:latin typeface="Malgun Gothic" pitchFamily="34" charset="0"/>
+                <a:ea typeface="Malgun Gothic" pitchFamily="34" charset="-122"/>
+                <a:cs typeface="Malgun Gothic" pitchFamily="34" charset="-120"/>
+              </a:rPr>
+              <a:t>핵심</a:t>
+            </a:r>
+            <a:endParaRPr lang="en-US" sz="1050" dirty="0"/>
+          </a:p>
+        </p:txBody>
       </p:sp>
       <p:sp>
         <p:nvSpPr>
@@ -3168,34 +3301,34 @@
         </p:nvSpPr>
         <p:spPr>
           <a:xfrm>
-            <a:off x="6461608" y="2670048"/>
-            <a:ext cx="1991792" cy="365760"/>
-          </a:xfrm>
-          <a:prstGeom prst="rect">
-            <a:avLst/>
-          </a:prstGeom>
-          <a:noFill/>
-          <a:ln/>
-        </p:spPr>
-        <p:txBody>
-          <a:bodyPr wrap="square" rtlCol="0" anchor="ctr"/>
-          <a:lstStyle/>
-          <a:p>
-            <a:pPr indent="0" marL="0">
-              <a:buNone/>
-            </a:pPr>
-            <a:r>
-              <a:rPr lang="en-US" sz="1900" b="1" dirty="0">
-                <a:solidFill>
-                  <a:srgbClr val="FECA0A"/>
-                </a:solidFill>
-                <a:latin typeface="Malgun Gothic" pitchFamily="34" charset="0"/>
-                <a:ea typeface="Malgun Gothic" pitchFamily="34" charset="-122"/>
-                <a:cs typeface="Malgun Gothic" pitchFamily="34" charset="-120"/>
-              </a:rPr>
-              <a:t>03</a:t>
-            </a:r>
-            <a:endParaRPr lang="en-US" sz="1900" dirty="0"/>
+            <a:off x="8277149" y="2898648"/>
+            <a:ext cx="2899562" cy="365760"/>
+          </a:xfrm>
+          <a:prstGeom prst="rect">
+            <a:avLst/>
+          </a:prstGeom>
+          <a:noFill/>
+          <a:ln/>
+        </p:spPr>
+        <p:txBody>
+          <a:bodyPr wrap="square" rtlCol="0" anchor="ctr"/>
+          <a:lstStyle/>
+          <a:p>
+            <a:pPr indent="0" marL="0">
+              <a:buNone/>
+            </a:pPr>
+            <a:r>
+              <a:rPr lang="en-US" sz="1450" b="1" dirty="0">
+                <a:solidFill>
+                  <a:srgbClr val="151515"/>
+                </a:solidFill>
+                <a:latin typeface="Malgun Gothic" pitchFamily="34" charset="0"/>
+                <a:ea typeface="Malgun Gothic" pitchFamily="34" charset="-122"/>
+                <a:cs typeface="Malgun Gothic" pitchFamily="34" charset="-120"/>
+              </a:rPr>
+              <a:t>③ 교육과정 공개</a:t>
+            </a:r>
+            <a:endParaRPr lang="en-US" sz="1450" dirty="0"/>
           </a:p>
         </p:txBody>
       </p:sp>
@@ -3207,47 +3340,8 @@
         </p:nvSpPr>
         <p:spPr>
           <a:xfrm>
-            <a:off x="6461608" y="3127248"/>
-            <a:ext cx="1991792" cy="365760"/>
-          </a:xfrm>
-          <a:prstGeom prst="rect">
-            <a:avLst/>
-          </a:prstGeom>
-          <a:noFill/>
-          <a:ln/>
-        </p:spPr>
-        <p:txBody>
-          <a:bodyPr wrap="square" rtlCol="0" anchor="ctr"/>
-          <a:lstStyle/>
-          <a:p>
-            <a:pPr indent="0" marL="0">
-              <a:buNone/>
-            </a:pPr>
-            <a:r>
-              <a:rPr lang="en-US" sz="1450" b="1" dirty="0">
-                <a:solidFill>
-                  <a:srgbClr val="FFFFFF"/>
-                </a:solidFill>
-                <a:latin typeface="Malgun Gothic" pitchFamily="34" charset="0"/>
-                <a:ea typeface="Malgun Gothic" pitchFamily="34" charset="-122"/>
-                <a:cs typeface="Malgun Gothic" pitchFamily="34" charset="-120"/>
-              </a:rPr>
-              <a:t>평가 시스템</a:t>
-            </a:r>
-            <a:endParaRPr lang="en-US" sz="1450" dirty="0"/>
-          </a:p>
-        </p:txBody>
-      </p:sp>
-      <p:sp>
-        <p:nvSpPr>
-          <p:cNvPr id="16" name="Text 14"/>
-          <p:cNvSpPr/>
-          <p:nvPr/>
-        </p:nvSpPr>
-        <p:spPr>
-          <a:xfrm>
-            <a:off x="6461608" y="3547872"/>
-            <a:ext cx="1991792" cy="676656"/>
+            <a:off x="8277149" y="3319272"/>
+            <a:ext cx="2899562" cy="356616"/>
           </a:xfrm>
           <a:prstGeom prst="rect">
             <a:avLst/>
@@ -3268,13 +3362,13 @@
             <a:r>
               <a:rPr lang="en-US" sz="1150" dirty="0">
                 <a:solidFill>
-                  <a:srgbClr val="C7C7D4"/>
-                </a:solidFill>
-                <a:latin typeface="Malgun Gothic" pitchFamily="34" charset="0"/>
-                <a:ea typeface="Malgun Gothic" pitchFamily="34" charset="-122"/>
-                <a:cs typeface="Malgun Gothic" pitchFamily="34" charset="-120"/>
-              </a:rPr>
-              <a:t>진단·리포트·수료 인증</a:t>
+                  <a:srgbClr val="494B4A"/>
+                </a:solidFill>
+                <a:latin typeface="Malgun Gothic" pitchFamily="34" charset="0"/>
+                <a:ea typeface="Malgun Gothic" pitchFamily="34" charset="-122"/>
+                <a:cs typeface="Malgun Gothic" pitchFamily="34" charset="-120"/>
+              </a:rPr>
+              <a:t>단계·차시·진단·교재 매핑을 투명하게 공개</a:t>
             </a:r>
             <a:endParaRPr lang="en-US" sz="1150" dirty="0"/>
           </a:p>
@@ -3282,30 +3376,76 @@
       </p:sp>
       <p:sp>
         <p:nvSpPr>
-          <p:cNvPr id="17" name="Shape 15"/>
-          <p:cNvSpPr/>
-          <p:nvPr/>
-        </p:nvSpPr>
-        <p:spPr>
-          <a:xfrm>
-            <a:off x="8947175" y="2468880"/>
-            <a:ext cx="2467280" cy="1920240"/>
+          <p:cNvPr id="16" name="Shape 14"/>
+          <p:cNvSpPr/>
+          <p:nvPr/>
+        </p:nvSpPr>
+        <p:spPr>
+          <a:xfrm>
+            <a:off x="777240" y="4096512"/>
+            <a:ext cx="3375050" cy="1600200"/>
           </a:xfrm>
           <a:prstGeom prst="roundRect">
             <a:avLst>
-              <a:gd name="adj" fmla="val 4286"/>
+              <a:gd name="adj" fmla="val 5143"/>
             </a:avLst>
           </a:prstGeom>
           <a:solidFill>
-            <a:srgbClr val="20232E"/>
+            <a:srgbClr val="FFFFFF"/>
           </a:solidFill>
           <a:ln w="12700">
             <a:solidFill>
-              <a:srgbClr val="33384A"/>
+              <a:srgbClr val="E7E7E7"/>
             </a:solidFill>
             <a:prstDash val="solid"/>
           </a:ln>
-        </p:spPr>
+          <a:effectLst>
+            <a:outerShdw sx="100000" sy="100000" kx="0" ky="0" algn="bl" rotWithShape="0" blurRad="101600" dist="25400" dir="5400000">
+              <a:srgbClr val="BFBFBF">
+                <a:alpha val="35000"/>
+              </a:srgbClr>
+            </a:outerShdw>
+          </a:effectLst>
+        </p:spPr>
+      </p:sp>
+      <p:sp>
+        <p:nvSpPr>
+          <p:cNvPr id="17" name="Text 15"/>
+          <p:cNvSpPr/>
+          <p:nvPr/>
+        </p:nvSpPr>
+        <p:spPr>
+          <a:xfrm>
+            <a:off x="1014984" y="4297680"/>
+            <a:ext cx="2899562" cy="365760"/>
+          </a:xfrm>
+          <a:prstGeom prst="rect">
+            <a:avLst/>
+          </a:prstGeom>
+          <a:noFill/>
+          <a:ln/>
+        </p:spPr>
+        <p:txBody>
+          <a:bodyPr wrap="square" rtlCol="0" anchor="ctr"/>
+          <a:lstStyle/>
+          <a:p>
+            <a:pPr indent="0" marL="0">
+              <a:buNone/>
+            </a:pPr>
+            <a:r>
+              <a:rPr lang="en-US" sz="1450" b="1" dirty="0">
+                <a:solidFill>
+                  <a:srgbClr val="151515"/>
+                </a:solidFill>
+                <a:latin typeface="Malgun Gothic" pitchFamily="34" charset="0"/>
+                <a:ea typeface="Malgun Gothic" pitchFamily="34" charset="-122"/>
+                <a:cs typeface="Malgun Gothic" pitchFamily="34" charset="-120"/>
+              </a:rPr>
+              <a:t>④ 4대 영역+공인시험</a:t>
+            </a:r>
+            <a:endParaRPr lang="en-US" sz="1450" dirty="0"/>
+          </a:p>
+        </p:txBody>
       </p:sp>
       <p:sp>
         <p:nvSpPr>
@@ -3315,86 +3455,8 @@
         </p:nvSpPr>
         <p:spPr>
           <a:xfrm>
-            <a:off x="9184919" y="2670048"/>
-            <a:ext cx="1991792" cy="365760"/>
-          </a:xfrm>
-          <a:prstGeom prst="rect">
-            <a:avLst/>
-          </a:prstGeom>
-          <a:noFill/>
-          <a:ln/>
-        </p:spPr>
-        <p:txBody>
-          <a:bodyPr wrap="square" rtlCol="0" anchor="ctr"/>
-          <a:lstStyle/>
-          <a:p>
-            <a:pPr indent="0" marL="0">
-              <a:buNone/>
-            </a:pPr>
-            <a:r>
-              <a:rPr lang="en-US" sz="1900" b="1" dirty="0">
-                <a:solidFill>
-                  <a:srgbClr val="FECA0A"/>
-                </a:solidFill>
-                <a:latin typeface="Malgun Gothic" pitchFamily="34" charset="0"/>
-                <a:ea typeface="Malgun Gothic" pitchFamily="34" charset="-122"/>
-                <a:cs typeface="Malgun Gothic" pitchFamily="34" charset="-120"/>
-              </a:rPr>
-              <a:t>04</a:t>
-            </a:r>
-            <a:endParaRPr lang="en-US" sz="1900" dirty="0"/>
-          </a:p>
-        </p:txBody>
-      </p:sp>
-      <p:sp>
-        <p:nvSpPr>
-          <p:cNvPr id="19" name="Text 17"/>
-          <p:cNvSpPr/>
-          <p:nvPr/>
-        </p:nvSpPr>
-        <p:spPr>
-          <a:xfrm>
-            <a:off x="9184919" y="3127248"/>
-            <a:ext cx="1991792" cy="365760"/>
-          </a:xfrm>
-          <a:prstGeom prst="rect">
-            <a:avLst/>
-          </a:prstGeom>
-          <a:noFill/>
-          <a:ln/>
-        </p:spPr>
-        <p:txBody>
-          <a:bodyPr wrap="square" rtlCol="0" anchor="ctr"/>
-          <a:lstStyle/>
-          <a:p>
-            <a:pPr indent="0" marL="0">
-              <a:buNone/>
-            </a:pPr>
-            <a:r>
-              <a:rPr lang="en-US" sz="1450" b="1" dirty="0">
-                <a:solidFill>
-                  <a:srgbClr val="FFFFFF"/>
-                </a:solidFill>
-                <a:latin typeface="Malgun Gothic" pitchFamily="34" charset="0"/>
-                <a:ea typeface="Malgun Gothic" pitchFamily="34" charset="-122"/>
-                <a:cs typeface="Malgun Gothic" pitchFamily="34" charset="-120"/>
-              </a:rPr>
-              <a:t>운영 매뉴얼</a:t>
-            </a:r>
-            <a:endParaRPr lang="en-US" sz="1450" dirty="0"/>
-          </a:p>
-        </p:txBody>
-      </p:sp>
-      <p:sp>
-        <p:nvSpPr>
-          <p:cNvPr id="20" name="Text 18"/>
-          <p:cNvSpPr/>
-          <p:nvPr/>
-        </p:nvSpPr>
-        <p:spPr>
-          <a:xfrm>
-            <a:off x="9184919" y="3547872"/>
-            <a:ext cx="1991792" cy="676656"/>
+            <a:off x="1014984" y="4718304"/>
+            <a:ext cx="2899562" cy="813816"/>
           </a:xfrm>
           <a:prstGeom prst="rect">
             <a:avLst/>
@@ -3415,13 +3477,353 @@
             <a:r>
               <a:rPr lang="en-US" sz="1150" dirty="0">
                 <a:solidFill>
-                  <a:srgbClr val="C7C7D4"/>
-                </a:solidFill>
-                <a:latin typeface="Malgun Gothic" pitchFamily="34" charset="0"/>
-                <a:ea typeface="Malgun Gothic" pitchFamily="34" charset="-122"/>
-                <a:cs typeface="Malgun Gothic" pitchFamily="34" charset="-120"/>
-              </a:rPr>
-              <a:t>본사 직영 노하우 전수</a:t>
+                  <a:srgbClr val="494B4A"/>
+                </a:solidFill>
+                <a:latin typeface="Malgun Gothic" pitchFamily="34" charset="0"/>
+                <a:ea typeface="Malgun Gothic" pitchFamily="34" charset="-122"/>
+                <a:cs typeface="Malgun Gothic" pitchFamily="34" charset="-120"/>
+              </a:rPr>
+              <a:t>L·R·S·W 통합 + JET·TOEIC Bridge·TOEIC·iBT 로드맵</a:t>
+            </a:r>
+            <a:endParaRPr lang="en-US" sz="1150" dirty="0"/>
+          </a:p>
+        </p:txBody>
+      </p:sp>
+      <p:sp>
+        <p:nvSpPr>
+          <p:cNvPr id="19" name="Shape 17"/>
+          <p:cNvSpPr/>
+          <p:nvPr/>
+        </p:nvSpPr>
+        <p:spPr>
+          <a:xfrm>
+            <a:off x="4408322" y="4096512"/>
+            <a:ext cx="3375050" cy="1600200"/>
+          </a:xfrm>
+          <a:prstGeom prst="roundRect">
+            <a:avLst>
+              <a:gd name="adj" fmla="val 5143"/>
+            </a:avLst>
+          </a:prstGeom>
+          <a:solidFill>
+            <a:srgbClr val="FFFFFF"/>
+          </a:solidFill>
+          <a:ln w="12700">
+            <a:solidFill>
+              <a:srgbClr val="E7E7E7"/>
+            </a:solidFill>
+            <a:prstDash val="solid"/>
+          </a:ln>
+          <a:effectLst>
+            <a:outerShdw sx="100000" sy="100000" kx="0" ky="0" algn="bl" rotWithShape="0" blurRad="101600" dist="25400" dir="5400000">
+              <a:srgbClr val="BFBFBF">
+                <a:alpha val="35000"/>
+              </a:srgbClr>
+            </a:outerShdw>
+          </a:effectLst>
+        </p:spPr>
+      </p:sp>
+      <p:sp>
+        <p:nvSpPr>
+          <p:cNvPr id="20" name="Text 18"/>
+          <p:cNvSpPr/>
+          <p:nvPr/>
+        </p:nvSpPr>
+        <p:spPr>
+          <a:xfrm>
+            <a:off x="4646066" y="4297680"/>
+            <a:ext cx="2899562" cy="365760"/>
+          </a:xfrm>
+          <a:prstGeom prst="rect">
+            <a:avLst/>
+          </a:prstGeom>
+          <a:noFill/>
+          <a:ln/>
+        </p:spPr>
+        <p:txBody>
+          <a:bodyPr wrap="square" rtlCol="0" anchor="ctr"/>
+          <a:lstStyle/>
+          <a:p>
+            <a:pPr indent="0" marL="0">
+              <a:buNone/>
+            </a:pPr>
+            <a:r>
+              <a:rPr lang="en-US" sz="1450" b="1" dirty="0">
+                <a:solidFill>
+                  <a:srgbClr val="151515"/>
+                </a:solidFill>
+                <a:latin typeface="Malgun Gothic" pitchFamily="34" charset="0"/>
+                <a:ea typeface="Malgun Gothic" pitchFamily="34" charset="-122"/>
+                <a:cs typeface="Malgun Gothic" pitchFamily="34" charset="-120"/>
+              </a:rPr>
+              <a:t>⑤ 온·오프 블렌디드</a:t>
+            </a:r>
+            <a:endParaRPr lang="en-US" sz="1450" dirty="0"/>
+          </a:p>
+        </p:txBody>
+      </p:sp>
+      <p:sp>
+        <p:nvSpPr>
+          <p:cNvPr id="21" name="Text 19"/>
+          <p:cNvSpPr/>
+          <p:nvPr/>
+        </p:nvSpPr>
+        <p:spPr>
+          <a:xfrm>
+            <a:off x="4646066" y="4718304"/>
+            <a:ext cx="2899562" cy="813816"/>
+          </a:xfrm>
+          <a:prstGeom prst="rect">
+            <a:avLst/>
+          </a:prstGeom>
+          <a:noFill/>
+          <a:ln/>
+        </p:spPr>
+        <p:txBody>
+          <a:bodyPr wrap="square" rtlCol="0" anchor="t"/>
+          <a:lstStyle/>
+          <a:p>
+            <a:pPr indent="0" marL="0">
+              <a:lnSpc>
+                <a:spcPct val="118000"/>
+              </a:lnSpc>
+              <a:buNone/>
+            </a:pPr>
+            <a:r>
+              <a:rPr lang="en-US" sz="1150" dirty="0">
+                <a:solidFill>
+                  <a:srgbClr val="494B4A"/>
+                </a:solidFill>
+                <a:latin typeface="Malgun Gothic" pitchFamily="34" charset="0"/>
+                <a:ea typeface="Malgun Gothic" pitchFamily="34" charset="-122"/>
+                <a:cs typeface="Malgun Gothic" pitchFamily="34" charset="-120"/>
+              </a:rPr>
+              <a:t>오프라인 1:1 코칭 + 학습앱(복습 알림·리포트)</a:t>
+            </a:r>
+            <a:endParaRPr lang="en-US" sz="1150" dirty="0"/>
+          </a:p>
+        </p:txBody>
+      </p:sp>
+      <p:sp>
+        <p:nvSpPr>
+          <p:cNvPr id="22" name="Shape 20"/>
+          <p:cNvSpPr/>
+          <p:nvPr/>
+        </p:nvSpPr>
+        <p:spPr>
+          <a:xfrm>
+            <a:off x="8039405" y="4096512"/>
+            <a:ext cx="3375050" cy="1600200"/>
+          </a:xfrm>
+          <a:prstGeom prst="roundRect">
+            <a:avLst>
+              <a:gd name="adj" fmla="val 5143"/>
+            </a:avLst>
+          </a:prstGeom>
+          <a:solidFill>
+            <a:srgbClr val="FFFFFF"/>
+          </a:solidFill>
+          <a:ln w="12700">
+            <a:solidFill>
+              <a:srgbClr val="E7E7E7"/>
+            </a:solidFill>
+            <a:prstDash val="solid"/>
+          </a:ln>
+          <a:effectLst>
+            <a:outerShdw sx="100000" sy="100000" kx="0" ky="0" algn="bl" rotWithShape="0" blurRad="101600" dist="25400" dir="5400000">
+              <a:srgbClr val="BFBFBF">
+                <a:alpha val="35000"/>
+              </a:srgbClr>
+            </a:outerShdw>
+          </a:effectLst>
+        </p:spPr>
+      </p:sp>
+      <p:sp>
+        <p:nvSpPr>
+          <p:cNvPr id="23" name="Text 21"/>
+          <p:cNvSpPr/>
+          <p:nvPr/>
+        </p:nvSpPr>
+        <p:spPr>
+          <a:xfrm>
+            <a:off x="8277149" y="4297680"/>
+            <a:ext cx="2899562" cy="365760"/>
+          </a:xfrm>
+          <a:prstGeom prst="rect">
+            <a:avLst/>
+          </a:prstGeom>
+          <a:noFill/>
+          <a:ln/>
+        </p:spPr>
+        <p:txBody>
+          <a:bodyPr wrap="square" rtlCol="0" anchor="ctr"/>
+          <a:lstStyle/>
+          <a:p>
+            <a:pPr indent="0" marL="0">
+              <a:buNone/>
+            </a:pPr>
+            <a:r>
+              <a:rPr lang="en-US" sz="1450" b="1" dirty="0">
+                <a:solidFill>
+                  <a:srgbClr val="151515"/>
+                </a:solidFill>
+                <a:latin typeface="Malgun Gothic" pitchFamily="34" charset="0"/>
+                <a:ea typeface="Malgun Gothic" pitchFamily="34" charset="-122"/>
+                <a:cs typeface="Malgun Gothic" pitchFamily="34" charset="-120"/>
+              </a:rPr>
+              <a:t>⑥ 유아~고등+가족</a:t>
+            </a:r>
+            <a:endParaRPr lang="en-US" sz="1450" dirty="0"/>
+          </a:p>
+        </p:txBody>
+      </p:sp>
+      <p:sp>
+        <p:nvSpPr>
+          <p:cNvPr id="24" name="Text 22"/>
+          <p:cNvSpPr/>
+          <p:nvPr/>
+        </p:nvSpPr>
+        <p:spPr>
+          <a:xfrm>
+            <a:off x="8277149" y="4718304"/>
+            <a:ext cx="2899562" cy="813816"/>
+          </a:xfrm>
+          <a:prstGeom prst="rect">
+            <a:avLst/>
+          </a:prstGeom>
+          <a:noFill/>
+          <a:ln/>
+        </p:spPr>
+        <p:txBody>
+          <a:bodyPr wrap="square" rtlCol="0" anchor="t"/>
+          <a:lstStyle/>
+          <a:p>
+            <a:pPr indent="0" marL="0">
+              <a:lnSpc>
+                <a:spcPct val="118000"/>
+              </a:lnSpc>
+              <a:buNone/>
+            </a:pPr>
+            <a:r>
+              <a:rPr lang="en-US" sz="1150" dirty="0">
+                <a:solidFill>
+                  <a:srgbClr val="494B4A"/>
+                </a:solidFill>
+                <a:latin typeface="Malgun Gothic" pitchFamily="34" charset="0"/>
+                <a:ea typeface="Malgun Gothic" pitchFamily="34" charset="-122"/>
+                <a:cs typeface="Malgun Gothic" pitchFamily="34" charset="-120"/>
+              </a:rPr>
+              <a:t>5과정 일관 + 가정 연계로 한 흐름</a:t>
+            </a:r>
+            <a:endParaRPr lang="en-US" sz="1150" dirty="0"/>
+          </a:p>
+        </p:txBody>
+      </p:sp>
+      <p:sp>
+        <p:nvSpPr>
+          <p:cNvPr id="25" name="Text 23"/>
+          <p:cNvSpPr/>
+          <p:nvPr/>
+        </p:nvSpPr>
+        <p:spPr>
+          <a:xfrm>
+            <a:off x="777240" y="6126480"/>
+            <a:ext cx="10637215" cy="548640"/>
+          </a:xfrm>
+          <a:prstGeom prst="rect">
+            <a:avLst/>
+          </a:prstGeom>
+          <a:noFill/>
+          <a:ln/>
+        </p:spPr>
+        <p:txBody>
+          <a:bodyPr wrap="square" rtlCol="0" anchor="t"/>
+          <a:lstStyle/>
+          <a:p>
+            <a:pPr indent="0" marL="0">
+              <a:lnSpc>
+                <a:spcPct val="120000"/>
+              </a:lnSpc>
+              <a:buNone/>
+            </a:pPr>
+            <a:r>
+              <a:rPr lang="en-US" sz="1150" dirty="0">
+                <a:solidFill>
+                  <a:srgbClr val="6B6B6B"/>
+                </a:solidFill>
+                <a:latin typeface="Malgun Gothic" pitchFamily="34" charset="0"/>
+                <a:ea typeface="Malgun Gothic" pitchFamily="34" charset="-122"/>
+                <a:cs typeface="Malgun Gothic" pitchFamily="34" charset="-120"/>
+              </a:rPr>
+              <a:t>유행이 아니라 </a:t>
+            </a:r>
+            <a:pPr indent="0" marL="0">
+              <a:lnSpc>
+                <a:spcPct val="120000"/>
+              </a:lnSpc>
+              <a:buNone/>
+            </a:pPr>
+            <a:r>
+              <a:rPr lang="en-US" sz="1150" b="1" dirty="0">
+                <a:solidFill>
+                  <a:srgbClr val="151515"/>
+                </a:solidFill>
+                <a:latin typeface="Malgun Gothic" pitchFamily="34" charset="0"/>
+                <a:ea typeface="Malgun Gothic" pitchFamily="34" charset="-122"/>
+                <a:cs typeface="Malgun Gothic" pitchFamily="34" charset="-120"/>
+              </a:rPr>
+              <a:t>검증된 연구</a:t>
+            </a:r>
+            <a:pPr indent="0" marL="0">
+              <a:lnSpc>
+                <a:spcPct val="120000"/>
+              </a:lnSpc>
+              <a:buNone/>
+            </a:pPr>
+            <a:r>
+              <a:rPr lang="en-US" sz="1150" dirty="0">
+                <a:solidFill>
+                  <a:srgbClr val="6B6B6B"/>
+                </a:solidFill>
+                <a:latin typeface="Malgun Gothic" pitchFamily="34" charset="0"/>
+                <a:ea typeface="Malgun Gothic" pitchFamily="34" charset="-122"/>
+                <a:cs typeface="Malgun Gothic" pitchFamily="34" charset="-120"/>
+              </a:rPr>
+              <a:t> 위에 설계하고, 그 </a:t>
+            </a:r>
+            <a:pPr indent="0" marL="0">
+              <a:lnSpc>
+                <a:spcPct val="120000"/>
+              </a:lnSpc>
+              <a:buNone/>
+            </a:pPr>
+            <a:r>
+              <a:rPr lang="en-US" sz="1150" b="1" dirty="0">
+                <a:solidFill>
+                  <a:srgbClr val="151515"/>
+                </a:solidFill>
+                <a:latin typeface="Malgun Gothic" pitchFamily="34" charset="0"/>
+                <a:ea typeface="Malgun Gothic" pitchFamily="34" charset="-122"/>
+                <a:cs typeface="Malgun Gothic" pitchFamily="34" charset="-120"/>
+              </a:rPr>
+              <a:t>근거를 공개</a:t>
+            </a:r>
+            <a:pPr indent="0" marL="0">
+              <a:lnSpc>
+                <a:spcPct val="120000"/>
+              </a:lnSpc>
+              <a:buNone/>
+            </a:pPr>
+            <a:r>
+              <a:rPr lang="en-US" sz="1150" dirty="0">
+                <a:solidFill>
+                  <a:srgbClr val="6B6B6B"/>
+                </a:solidFill>
+                <a:latin typeface="Malgun Gothic" pitchFamily="34" charset="0"/>
+                <a:ea typeface="Malgun Gothic" pitchFamily="34" charset="-122"/>
+                <a:cs typeface="Malgun Gothic" pitchFamily="34" charset="-120"/>
+              </a:rPr>
+              <a:t>합니다 — Krashen·과학적 읽기·다독·인출/간격반복·SDT.</a:t>
             </a:r>
             <a:endParaRPr lang="en-US" sz="1150" dirty="0"/>
           </a:p>
@@ -3514,7 +3916,7 @@
                 <a:ea typeface="Malgun Gothic" pitchFamily="34" charset="-122"/>
                 <a:cs typeface="Malgun Gothic" pitchFamily="34" charset="-120"/>
               </a:rPr>
-              <a:t>가맹 지원 · 절차</a:t>
+              <a:t>가맹 강점</a:t>
             </a:r>
             <a:endParaRPr lang="en-US" sz="1100" dirty="0"/>
           </a:p>
@@ -3556,7 +3958,7 @@
                 <a:ea typeface="Malgun Gothic" pitchFamily="34" charset="-122"/>
                 <a:cs typeface="Malgun Gothic" pitchFamily="34" charset="-120"/>
               </a:rPr>
-              <a:t>오픈부터 운영까지 </a:t>
+              <a:t>검증된 시스템을 </a:t>
             </a:r>
             <a:pPr indent="0" marL="0">
               <a:lnSpc>
@@ -3573,7 +3975,7 @@
                 <a:ea typeface="Malgun Gothic" pitchFamily="34" charset="-122"/>
                 <a:cs typeface="Malgun Gothic" pitchFamily="34" charset="-120"/>
               </a:rPr>
-              <a:t>함께</a:t>
+              <a:t>그대로</a:t>
             </a:r>
             <a:endParaRPr lang="en-US" sz="3200" dirty="0"/>
           </a:p>
@@ -3587,12 +3989,12 @@
         </p:nvSpPr>
         <p:spPr>
           <a:xfrm>
-            <a:off x="777240" y="2286000"/>
-            <a:ext cx="2467280" cy="1554480"/>
+            <a:off x="777240" y="2468880"/>
+            <a:ext cx="2467280" cy="1920240"/>
           </a:xfrm>
           <a:prstGeom prst="roundRect">
             <a:avLst>
-              <a:gd name="adj" fmla="val 5294"/>
+              <a:gd name="adj" fmla="val 4286"/>
             </a:avLst>
           </a:prstGeom>
           <a:solidFill>
@@ -3614,7 +4016,7 @@
         </p:nvSpPr>
         <p:spPr>
           <a:xfrm>
-            <a:off x="1014984" y="2487168"/>
+            <a:off x="1014984" y="2670048"/>
             <a:ext cx="1991792" cy="365760"/>
           </a:xfrm>
           <a:prstGeom prst="rect">
@@ -3631,6 +4033,45 @@
               <a:buNone/>
             </a:pPr>
             <a:r>
+              <a:rPr lang="en-US" sz="1900" b="1" dirty="0">
+                <a:solidFill>
+                  <a:srgbClr val="FECA0A"/>
+                </a:solidFill>
+                <a:latin typeface="Malgun Gothic" pitchFamily="34" charset="0"/>
+                <a:ea typeface="Malgun Gothic" pitchFamily="34" charset="-122"/>
+                <a:cs typeface="Malgun Gothic" pitchFamily="34" charset="-120"/>
+              </a:rPr>
+              <a:t>01</a:t>
+            </a:r>
+            <a:endParaRPr lang="en-US" sz="1900" dirty="0"/>
+          </a:p>
+        </p:txBody>
+      </p:sp>
+      <p:sp>
+        <p:nvSpPr>
+          <p:cNvPr id="7" name="Text 5"/>
+          <p:cNvSpPr/>
+          <p:nvPr/>
+        </p:nvSpPr>
+        <p:spPr>
+          <a:xfrm>
+            <a:off x="1014984" y="3127248"/>
+            <a:ext cx="1991792" cy="365760"/>
+          </a:xfrm>
+          <a:prstGeom prst="rect">
+            <a:avLst/>
+          </a:prstGeom>
+          <a:noFill/>
+          <a:ln/>
+        </p:spPr>
+        <p:txBody>
+          <a:bodyPr wrap="square" rtlCol="0" anchor="ctr"/>
+          <a:lstStyle/>
+          <a:p>
+            <a:pPr indent="0" marL="0">
+              <a:buNone/>
+            </a:pPr>
+            <a:r>
               <a:rPr lang="en-US" sz="1450" b="1" dirty="0">
                 <a:solidFill>
                   <a:srgbClr val="FFFFFF"/>
@@ -3639,7 +4080,7 @@
                 <a:ea typeface="Malgun Gothic" pitchFamily="34" charset="-122"/>
                 <a:cs typeface="Malgun Gothic" pitchFamily="34" charset="-120"/>
               </a:rPr>
-              <a:t>오픈 지원</a:t>
+              <a:t>검증된 커리큘럼</a:t>
             </a:r>
             <a:endParaRPr lang="en-US" sz="1450" dirty="0"/>
           </a:p>
@@ -3647,14 +4088,14 @@
       </p:sp>
       <p:sp>
         <p:nvSpPr>
-          <p:cNvPr id="7" name="Text 5"/>
-          <p:cNvSpPr/>
-          <p:nvPr/>
-        </p:nvSpPr>
-        <p:spPr>
-          <a:xfrm>
-            <a:off x="1014984" y="2907792"/>
-            <a:ext cx="1991792" cy="768096"/>
+          <p:cNvPr id="8" name="Text 6"/>
+          <p:cNvSpPr/>
+          <p:nvPr/>
+        </p:nvSpPr>
+        <p:spPr>
+          <a:xfrm>
+            <a:off x="1014984" y="3547872"/>
+            <a:ext cx="1991792" cy="676656"/>
           </a:xfrm>
           <a:prstGeom prst="rect">
             <a:avLst/>
@@ -3681,7 +4122,7 @@
                 <a:ea typeface="Malgun Gothic" pitchFamily="34" charset="-122"/>
                 <a:cs typeface="Malgun Gothic" pitchFamily="34" charset="-120"/>
               </a:rPr>
-              <a:t>상권분석·인테리어 가이드</a:t>
+              <a:t>레벨링·4대영역·공인시험 연계</a:t>
             </a:r>
             <a:endParaRPr lang="en-US" sz="1150" dirty="0"/>
           </a:p>
@@ -3689,18 +4130,18 @@
       </p:sp>
       <p:sp>
         <p:nvSpPr>
-          <p:cNvPr id="8" name="Shape 6"/>
-          <p:cNvSpPr/>
-          <p:nvPr/>
-        </p:nvSpPr>
-        <p:spPr>
-          <a:xfrm>
-            <a:off x="3500552" y="2286000"/>
-            <a:ext cx="2467280" cy="1554480"/>
+          <p:cNvPr id="9" name="Shape 7"/>
+          <p:cNvSpPr/>
+          <p:nvPr/>
+        </p:nvSpPr>
+        <p:spPr>
+          <a:xfrm>
+            <a:off x="3500552" y="2468880"/>
+            <a:ext cx="2467280" cy="1920240"/>
           </a:xfrm>
           <a:prstGeom prst="roundRect">
             <a:avLst>
-              <a:gd name="adj" fmla="val 5294"/>
+              <a:gd name="adj" fmla="val 4286"/>
             </a:avLst>
           </a:prstGeom>
           <a:solidFill>
@@ -3716,13 +4157,13 @@
       </p:sp>
       <p:sp>
         <p:nvSpPr>
-          <p:cNvPr id="9" name="Text 7"/>
-          <p:cNvSpPr/>
-          <p:nvPr/>
-        </p:nvSpPr>
-        <p:spPr>
-          <a:xfrm>
-            <a:off x="3738296" y="2487168"/>
+          <p:cNvPr id="10" name="Text 8"/>
+          <p:cNvSpPr/>
+          <p:nvPr/>
+        </p:nvSpPr>
+        <p:spPr>
+          <a:xfrm>
+            <a:off x="3738296" y="2670048"/>
             <a:ext cx="1991792" cy="365760"/>
           </a:xfrm>
           <a:prstGeom prst="rect">
@@ -3739,6 +4180,45 @@
               <a:buNone/>
             </a:pPr>
             <a:r>
+              <a:rPr lang="en-US" sz="1900" b="1" dirty="0">
+                <a:solidFill>
+                  <a:srgbClr val="FECA0A"/>
+                </a:solidFill>
+                <a:latin typeface="Malgun Gothic" pitchFamily="34" charset="0"/>
+                <a:ea typeface="Malgun Gothic" pitchFamily="34" charset="-122"/>
+                <a:cs typeface="Malgun Gothic" pitchFamily="34" charset="-120"/>
+              </a:rPr>
+              <a:t>02</a:t>
+            </a:r>
+            <a:endParaRPr lang="en-US" sz="1900" dirty="0"/>
+          </a:p>
+        </p:txBody>
+      </p:sp>
+      <p:sp>
+        <p:nvSpPr>
+          <p:cNvPr id="11" name="Text 9"/>
+          <p:cNvSpPr/>
+          <p:nvPr/>
+        </p:nvSpPr>
+        <p:spPr>
+          <a:xfrm>
+            <a:off x="3738296" y="3127248"/>
+            <a:ext cx="1991792" cy="365760"/>
+          </a:xfrm>
+          <a:prstGeom prst="rect">
+            <a:avLst/>
+          </a:prstGeom>
+          <a:noFill/>
+          <a:ln/>
+        </p:spPr>
+        <p:txBody>
+          <a:bodyPr wrap="square" rtlCol="0" anchor="ctr"/>
+          <a:lstStyle/>
+          <a:p>
+            <a:pPr indent="0" marL="0">
+              <a:buNone/>
+            </a:pPr>
+            <a:r>
               <a:rPr lang="en-US" sz="1450" b="1" dirty="0">
                 <a:solidFill>
                   <a:srgbClr val="FFFFFF"/>
@@ -3747,7 +4227,7 @@
                 <a:ea typeface="Malgun Gothic" pitchFamily="34" charset="-122"/>
                 <a:cs typeface="Malgun Gothic" pitchFamily="34" charset="-120"/>
               </a:rPr>
-              <a:t>강사 교육</a:t>
+              <a:t>교재·콘텐츠</a:t>
             </a:r>
             <a:endParaRPr lang="en-US" sz="1450" dirty="0"/>
           </a:p>
@@ -3755,14 +4235,14 @@
       </p:sp>
       <p:sp>
         <p:nvSpPr>
-          <p:cNvPr id="10" name="Text 8"/>
-          <p:cNvSpPr/>
-          <p:nvPr/>
-        </p:nvSpPr>
-        <p:spPr>
-          <a:xfrm>
-            <a:off x="3738296" y="2907792"/>
-            <a:ext cx="1991792" cy="768096"/>
+          <p:cNvPr id="12" name="Text 10"/>
+          <p:cNvSpPr/>
+          <p:nvPr/>
+        </p:nvSpPr>
+        <p:spPr>
+          <a:xfrm>
+            <a:off x="3738296" y="3547872"/>
+            <a:ext cx="1991792" cy="676656"/>
           </a:xfrm>
           <a:prstGeom prst="rect">
             <a:avLst/>
@@ -3789,7 +4269,7 @@
                 <a:ea typeface="Malgun Gothic" pitchFamily="34" charset="-122"/>
                 <a:cs typeface="Malgun Gothic" pitchFamily="34" charset="-120"/>
               </a:rPr>
-              <a:t>교수법·시스템 교육</a:t>
+              <a:t>단계별 자체 개발 교재·앱</a:t>
             </a:r>
             <a:endParaRPr lang="en-US" sz="1150" dirty="0"/>
           </a:p>
@@ -3797,18 +4277,18 @@
       </p:sp>
       <p:sp>
         <p:nvSpPr>
-          <p:cNvPr id="11" name="Shape 9"/>
-          <p:cNvSpPr/>
-          <p:nvPr/>
-        </p:nvSpPr>
-        <p:spPr>
-          <a:xfrm>
-            <a:off x="6223864" y="2286000"/>
-            <a:ext cx="2467280" cy="1554480"/>
+          <p:cNvPr id="13" name="Shape 11"/>
+          <p:cNvSpPr/>
+          <p:nvPr/>
+        </p:nvSpPr>
+        <p:spPr>
+          <a:xfrm>
+            <a:off x="6223864" y="2468880"/>
+            <a:ext cx="2467280" cy="1920240"/>
           </a:xfrm>
           <a:prstGeom prst="roundRect">
             <a:avLst>
-              <a:gd name="adj" fmla="val 5294"/>
+              <a:gd name="adj" fmla="val 4286"/>
             </a:avLst>
           </a:prstGeom>
           <a:solidFill>
@@ -3824,13 +4304,13 @@
       </p:sp>
       <p:sp>
         <p:nvSpPr>
-          <p:cNvPr id="12" name="Text 10"/>
-          <p:cNvSpPr/>
-          <p:nvPr/>
-        </p:nvSpPr>
-        <p:spPr>
-          <a:xfrm>
-            <a:off x="6461608" y="2487168"/>
+          <p:cNvPr id="14" name="Text 12"/>
+          <p:cNvSpPr/>
+          <p:nvPr/>
+        </p:nvSpPr>
+        <p:spPr>
+          <a:xfrm>
+            <a:off x="6461608" y="2670048"/>
             <a:ext cx="1991792" cy="365760"/>
           </a:xfrm>
           <a:prstGeom prst="rect">
@@ -3847,6 +4327,45 @@
               <a:buNone/>
             </a:pPr>
             <a:r>
+              <a:rPr lang="en-US" sz="1900" b="1" dirty="0">
+                <a:solidFill>
+                  <a:srgbClr val="FECA0A"/>
+                </a:solidFill>
+                <a:latin typeface="Malgun Gothic" pitchFamily="34" charset="0"/>
+                <a:ea typeface="Malgun Gothic" pitchFamily="34" charset="-122"/>
+                <a:cs typeface="Malgun Gothic" pitchFamily="34" charset="-120"/>
+              </a:rPr>
+              <a:t>03</a:t>
+            </a:r>
+            <a:endParaRPr lang="en-US" sz="1900" dirty="0"/>
+          </a:p>
+        </p:txBody>
+      </p:sp>
+      <p:sp>
+        <p:nvSpPr>
+          <p:cNvPr id="15" name="Text 13"/>
+          <p:cNvSpPr/>
+          <p:nvPr/>
+        </p:nvSpPr>
+        <p:spPr>
+          <a:xfrm>
+            <a:off x="6461608" y="3127248"/>
+            <a:ext cx="1991792" cy="365760"/>
+          </a:xfrm>
+          <a:prstGeom prst="rect">
+            <a:avLst/>
+          </a:prstGeom>
+          <a:noFill/>
+          <a:ln/>
+        </p:spPr>
+        <p:txBody>
+          <a:bodyPr wrap="square" rtlCol="0" anchor="ctr"/>
+          <a:lstStyle/>
+          <a:p>
+            <a:pPr indent="0" marL="0">
+              <a:buNone/>
+            </a:pPr>
+            <a:r>
               <a:rPr lang="en-US" sz="1450" b="1" dirty="0">
                 <a:solidFill>
                   <a:srgbClr val="FFFFFF"/>
@@ -3855,7 +4374,7 @@
                 <a:ea typeface="Malgun Gothic" pitchFamily="34" charset="-122"/>
                 <a:cs typeface="Malgun Gothic" pitchFamily="34" charset="-120"/>
               </a:rPr>
-              <a:t>마케팅</a:t>
+              <a:t>평가 시스템</a:t>
             </a:r>
             <a:endParaRPr lang="en-US" sz="1450" dirty="0"/>
           </a:p>
@@ -3863,14 +4382,14 @@
       </p:sp>
       <p:sp>
         <p:nvSpPr>
-          <p:cNvPr id="13" name="Text 11"/>
-          <p:cNvSpPr/>
-          <p:nvPr/>
-        </p:nvSpPr>
-        <p:spPr>
-          <a:xfrm>
-            <a:off x="6461608" y="2907792"/>
-            <a:ext cx="1991792" cy="768096"/>
+          <p:cNvPr id="16" name="Text 14"/>
+          <p:cNvSpPr/>
+          <p:nvPr/>
+        </p:nvSpPr>
+        <p:spPr>
+          <a:xfrm>
+            <a:off x="6461608" y="3547872"/>
+            <a:ext cx="1991792" cy="676656"/>
           </a:xfrm>
           <a:prstGeom prst="rect">
             <a:avLst/>
@@ -3897,7 +4416,7 @@
                 <a:ea typeface="Malgun Gothic" pitchFamily="34" charset="-122"/>
                 <a:cs typeface="Malgun Gothic" pitchFamily="34" charset="-120"/>
               </a:rPr>
-              <a:t>브랜드·지역 홍보 지원</a:t>
+              <a:t>진단·리포트·수료 인증</a:t>
             </a:r>
             <a:endParaRPr lang="en-US" sz="1150" dirty="0"/>
           </a:p>
@@ -3905,18 +4424,18 @@
       </p:sp>
       <p:sp>
         <p:nvSpPr>
-          <p:cNvPr id="14" name="Shape 12"/>
-          <p:cNvSpPr/>
-          <p:nvPr/>
-        </p:nvSpPr>
-        <p:spPr>
-          <a:xfrm>
-            <a:off x="8947175" y="2286000"/>
-            <a:ext cx="2467280" cy="1554480"/>
+          <p:cNvPr id="17" name="Shape 15"/>
+          <p:cNvSpPr/>
+          <p:nvPr/>
+        </p:nvSpPr>
+        <p:spPr>
+          <a:xfrm>
+            <a:off x="8947175" y="2468880"/>
+            <a:ext cx="2467280" cy="1920240"/>
           </a:xfrm>
           <a:prstGeom prst="roundRect">
             <a:avLst>
-              <a:gd name="adj" fmla="val 5294"/>
+              <a:gd name="adj" fmla="val 4286"/>
             </a:avLst>
           </a:prstGeom>
           <a:solidFill>
@@ -3932,13 +4451,13 @@
       </p:sp>
       <p:sp>
         <p:nvSpPr>
-          <p:cNvPr id="15" name="Text 13"/>
-          <p:cNvSpPr/>
-          <p:nvPr/>
-        </p:nvSpPr>
-        <p:spPr>
-          <a:xfrm>
-            <a:off x="9184919" y="2487168"/>
+          <p:cNvPr id="18" name="Text 16"/>
+          <p:cNvSpPr/>
+          <p:nvPr/>
+        </p:nvSpPr>
+        <p:spPr>
+          <a:xfrm>
+            <a:off x="9184919" y="2670048"/>
             <a:ext cx="1991792" cy="365760"/>
           </a:xfrm>
           <a:prstGeom prst="rect">
@@ -3955,6 +4474,45 @@
               <a:buNone/>
             </a:pPr>
             <a:r>
+              <a:rPr lang="en-US" sz="1900" b="1" dirty="0">
+                <a:solidFill>
+                  <a:srgbClr val="FECA0A"/>
+                </a:solidFill>
+                <a:latin typeface="Malgun Gothic" pitchFamily="34" charset="0"/>
+                <a:ea typeface="Malgun Gothic" pitchFamily="34" charset="-122"/>
+                <a:cs typeface="Malgun Gothic" pitchFamily="34" charset="-120"/>
+              </a:rPr>
+              <a:t>04</a:t>
+            </a:r>
+            <a:endParaRPr lang="en-US" sz="1900" dirty="0"/>
+          </a:p>
+        </p:txBody>
+      </p:sp>
+      <p:sp>
+        <p:nvSpPr>
+          <p:cNvPr id="19" name="Text 17"/>
+          <p:cNvSpPr/>
+          <p:nvPr/>
+        </p:nvSpPr>
+        <p:spPr>
+          <a:xfrm>
+            <a:off x="9184919" y="3127248"/>
+            <a:ext cx="1991792" cy="365760"/>
+          </a:xfrm>
+          <a:prstGeom prst="rect">
+            <a:avLst/>
+          </a:prstGeom>
+          <a:noFill/>
+          <a:ln/>
+        </p:spPr>
+        <p:txBody>
+          <a:bodyPr wrap="square" rtlCol="0" anchor="ctr"/>
+          <a:lstStyle/>
+          <a:p>
+            <a:pPr indent="0" marL="0">
+              <a:buNone/>
+            </a:pPr>
+            <a:r>
               <a:rPr lang="en-US" sz="1450" b="1" dirty="0">
                 <a:solidFill>
                   <a:srgbClr val="FFFFFF"/>
@@ -3963,7 +4521,7 @@
                 <a:ea typeface="Malgun Gothic" pitchFamily="34" charset="-122"/>
                 <a:cs typeface="Malgun Gothic" pitchFamily="34" charset="-120"/>
               </a:rPr>
-              <a:t>슈퍼바이징</a:t>
+              <a:t>운영 매뉴얼</a:t>
             </a:r>
             <a:endParaRPr lang="en-US" sz="1450" dirty="0"/>
           </a:p>
@@ -3971,14 +4529,14 @@
       </p:sp>
       <p:sp>
         <p:nvSpPr>
-          <p:cNvPr id="16" name="Text 14"/>
-          <p:cNvSpPr/>
-          <p:nvPr/>
-        </p:nvSpPr>
-        <p:spPr>
-          <a:xfrm>
-            <a:off x="9184919" y="2907792"/>
-            <a:ext cx="1991792" cy="768096"/>
+          <p:cNvPr id="20" name="Text 18"/>
+          <p:cNvSpPr/>
+          <p:nvPr/>
+        </p:nvSpPr>
+        <p:spPr>
+          <a:xfrm>
+            <a:off x="9184919" y="3547872"/>
+            <a:ext cx="1991792" cy="676656"/>
           </a:xfrm>
           <a:prstGeom prst="rect">
             <a:avLst/>
@@ -4005,568 +4563,7 @@
                 <a:ea typeface="Malgun Gothic" pitchFamily="34" charset="-122"/>
                 <a:cs typeface="Malgun Gothic" pitchFamily="34" charset="-120"/>
               </a:rPr>
-              <a:t>정기 운영 컨설팅</a:t>
-            </a:r>
-            <a:endParaRPr lang="en-US" sz="1150" dirty="0"/>
-          </a:p>
-        </p:txBody>
-      </p:sp>
-      <p:sp>
-        <p:nvSpPr>
-          <p:cNvPr id="17" name="Text 15"/>
-          <p:cNvSpPr/>
-          <p:nvPr/>
-        </p:nvSpPr>
-        <p:spPr>
-          <a:xfrm>
-            <a:off x="777240" y="4251960"/>
-            <a:ext cx="1577340" cy="457200"/>
-          </a:xfrm>
-          <a:prstGeom prst="roundRect">
-            <a:avLst>
-              <a:gd name="adj" fmla="val 50000"/>
-            </a:avLst>
-          </a:prstGeom>
-          <a:solidFill>
-            <a:srgbClr val="20232E"/>
-          </a:solidFill>
-          <a:ln w="12700">
-            <a:solidFill>
-              <a:srgbClr val="33384A"/>
-            </a:solidFill>
-          </a:ln>
-        </p:spPr>
-        <p:txBody>
-          <a:bodyPr wrap="square" rtlCol="0" anchor="ctr"/>
-          <a:lstStyle/>
-          <a:p>
-            <a:pPr algn="ctr" indent="0" marL="0">
-              <a:buNone/>
-            </a:pPr>
-            <a:r>
-              <a:rPr lang="en-US" sz="1150" b="1" dirty="0">
-                <a:solidFill>
-                  <a:srgbClr val="FECA0A"/>
-                </a:solidFill>
-                <a:latin typeface="Malgun Gothic" pitchFamily="34" charset="0"/>
-                <a:ea typeface="Malgun Gothic" pitchFamily="34" charset="-122"/>
-                <a:cs typeface="Malgun Gothic" pitchFamily="34" charset="-120"/>
-              </a:rPr>
-              <a:t>01 </a:t>
-            </a:r>
-            <a:pPr algn="ctr" indent="0" marL="0">
-              <a:buNone/>
-            </a:pPr>
-            <a:r>
-              <a:rPr lang="en-US" sz="1150" b="1" dirty="0">
-                <a:solidFill>
-                  <a:srgbClr val="FFFFFF"/>
-                </a:solidFill>
-                <a:latin typeface="Malgun Gothic" pitchFamily="34" charset="0"/>
-                <a:ea typeface="Malgun Gothic" pitchFamily="34" charset="-122"/>
-                <a:cs typeface="Malgun Gothic" pitchFamily="34" charset="-120"/>
-              </a:rPr>
-              <a:t>가맹 문의</a:t>
-            </a:r>
-            <a:endParaRPr lang="en-US" sz="1150" dirty="0"/>
-          </a:p>
-        </p:txBody>
-      </p:sp>
-      <p:sp>
-        <p:nvSpPr>
-          <p:cNvPr id="18" name="Text 16"/>
-          <p:cNvSpPr/>
-          <p:nvPr/>
-        </p:nvSpPr>
-        <p:spPr>
-          <a:xfrm>
-            <a:off x="2500884" y="4251960"/>
-            <a:ext cx="146304" cy="457200"/>
-          </a:xfrm>
-          <a:prstGeom prst="rect">
-            <a:avLst/>
-          </a:prstGeom>
-          <a:noFill/>
-          <a:ln/>
-        </p:spPr>
-        <p:txBody>
-          <a:bodyPr wrap="square" rtlCol="0" anchor="ctr"/>
-          <a:lstStyle/>
-          <a:p>
-            <a:pPr algn="ctr" indent="0" marL="0">
-              <a:buNone/>
-            </a:pPr>
-            <a:r>
-              <a:rPr lang="en-US" sz="1300" dirty="0">
-                <a:solidFill>
-                  <a:srgbClr val="6B6B6B"/>
-                </a:solidFill>
-                <a:latin typeface="Malgun Gothic" pitchFamily="34" charset="0"/>
-                <a:ea typeface="Malgun Gothic" pitchFamily="34" charset="-122"/>
-                <a:cs typeface="Malgun Gothic" pitchFamily="34" charset="-120"/>
-              </a:rPr>
-              <a:t>›</a:t>
-            </a:r>
-            <a:endParaRPr lang="en-US" sz="1300" dirty="0"/>
-          </a:p>
-        </p:txBody>
-      </p:sp>
-      <p:sp>
-        <p:nvSpPr>
-          <p:cNvPr id="19" name="Text 17"/>
-          <p:cNvSpPr/>
-          <p:nvPr/>
-        </p:nvSpPr>
-        <p:spPr>
-          <a:xfrm>
-            <a:off x="2665476" y="4251960"/>
-            <a:ext cx="1577340" cy="457200"/>
-          </a:xfrm>
-          <a:prstGeom prst="roundRect">
-            <a:avLst>
-              <a:gd name="adj" fmla="val 50000"/>
-            </a:avLst>
-          </a:prstGeom>
-          <a:solidFill>
-            <a:srgbClr val="20232E"/>
-          </a:solidFill>
-          <a:ln w="12700">
-            <a:solidFill>
-              <a:srgbClr val="33384A"/>
-            </a:solidFill>
-          </a:ln>
-        </p:spPr>
-        <p:txBody>
-          <a:bodyPr wrap="square" rtlCol="0" anchor="ctr"/>
-          <a:lstStyle/>
-          <a:p>
-            <a:pPr algn="ctr" indent="0" marL="0">
-              <a:buNone/>
-            </a:pPr>
-            <a:r>
-              <a:rPr lang="en-US" sz="1150" b="1" dirty="0">
-                <a:solidFill>
-                  <a:srgbClr val="FECA0A"/>
-                </a:solidFill>
-                <a:latin typeface="Malgun Gothic" pitchFamily="34" charset="0"/>
-                <a:ea typeface="Malgun Gothic" pitchFamily="34" charset="-122"/>
-                <a:cs typeface="Malgun Gothic" pitchFamily="34" charset="-120"/>
-              </a:rPr>
-              <a:t>02 </a:t>
-            </a:r>
-            <a:pPr algn="ctr" indent="0" marL="0">
-              <a:buNone/>
-            </a:pPr>
-            <a:r>
-              <a:rPr lang="en-US" sz="1150" b="1" dirty="0">
-                <a:solidFill>
-                  <a:srgbClr val="FFFFFF"/>
-                </a:solidFill>
-                <a:latin typeface="Malgun Gothic" pitchFamily="34" charset="0"/>
-                <a:ea typeface="Malgun Gothic" pitchFamily="34" charset="-122"/>
-                <a:cs typeface="Malgun Gothic" pitchFamily="34" charset="-120"/>
-              </a:rPr>
-              <a:t>상담·설명</a:t>
-            </a:r>
-            <a:endParaRPr lang="en-US" sz="1150" dirty="0"/>
-          </a:p>
-        </p:txBody>
-      </p:sp>
-      <p:sp>
-        <p:nvSpPr>
-          <p:cNvPr id="20" name="Text 18"/>
-          <p:cNvSpPr/>
-          <p:nvPr/>
-        </p:nvSpPr>
-        <p:spPr>
-          <a:xfrm>
-            <a:off x="4389120" y="4251960"/>
-            <a:ext cx="146304" cy="457200"/>
-          </a:xfrm>
-          <a:prstGeom prst="rect">
-            <a:avLst/>
-          </a:prstGeom>
-          <a:noFill/>
-          <a:ln/>
-        </p:spPr>
-        <p:txBody>
-          <a:bodyPr wrap="square" rtlCol="0" anchor="ctr"/>
-          <a:lstStyle/>
-          <a:p>
-            <a:pPr algn="ctr" indent="0" marL="0">
-              <a:buNone/>
-            </a:pPr>
-            <a:r>
-              <a:rPr lang="en-US" sz="1300" dirty="0">
-                <a:solidFill>
-                  <a:srgbClr val="6B6B6B"/>
-                </a:solidFill>
-                <a:latin typeface="Malgun Gothic" pitchFamily="34" charset="0"/>
-                <a:ea typeface="Malgun Gothic" pitchFamily="34" charset="-122"/>
-                <a:cs typeface="Malgun Gothic" pitchFamily="34" charset="-120"/>
-              </a:rPr>
-              <a:t>›</a:t>
-            </a:r>
-            <a:endParaRPr lang="en-US" sz="1300" dirty="0"/>
-          </a:p>
-        </p:txBody>
-      </p:sp>
-      <p:sp>
-        <p:nvSpPr>
-          <p:cNvPr id="21" name="Text 19"/>
-          <p:cNvSpPr/>
-          <p:nvPr/>
-        </p:nvSpPr>
-        <p:spPr>
-          <a:xfrm>
-            <a:off x="4553712" y="4251960"/>
-            <a:ext cx="1577340" cy="457200"/>
-          </a:xfrm>
-          <a:prstGeom prst="roundRect">
-            <a:avLst>
-              <a:gd name="adj" fmla="val 50000"/>
-            </a:avLst>
-          </a:prstGeom>
-          <a:solidFill>
-            <a:srgbClr val="20232E"/>
-          </a:solidFill>
-          <a:ln w="12700">
-            <a:solidFill>
-              <a:srgbClr val="33384A"/>
-            </a:solidFill>
-          </a:ln>
-        </p:spPr>
-        <p:txBody>
-          <a:bodyPr wrap="square" rtlCol="0" anchor="ctr"/>
-          <a:lstStyle/>
-          <a:p>
-            <a:pPr algn="ctr" indent="0" marL="0">
-              <a:buNone/>
-            </a:pPr>
-            <a:r>
-              <a:rPr lang="en-US" sz="1150" b="1" dirty="0">
-                <a:solidFill>
-                  <a:srgbClr val="FECA0A"/>
-                </a:solidFill>
-                <a:latin typeface="Malgun Gothic" pitchFamily="34" charset="0"/>
-                <a:ea typeface="Malgun Gothic" pitchFamily="34" charset="-122"/>
-                <a:cs typeface="Malgun Gothic" pitchFamily="34" charset="-120"/>
-              </a:rPr>
-              <a:t>03 </a:t>
-            </a:r>
-            <a:pPr algn="ctr" indent="0" marL="0">
-              <a:buNone/>
-            </a:pPr>
-            <a:r>
-              <a:rPr lang="en-US" sz="1150" b="1" dirty="0">
-                <a:solidFill>
-                  <a:srgbClr val="FFFFFF"/>
-                </a:solidFill>
-                <a:latin typeface="Malgun Gothic" pitchFamily="34" charset="0"/>
-                <a:ea typeface="Malgun Gothic" pitchFamily="34" charset="-122"/>
-                <a:cs typeface="Malgun Gothic" pitchFamily="34" charset="-120"/>
-              </a:rPr>
-              <a:t>상권 분석</a:t>
-            </a:r>
-            <a:endParaRPr lang="en-US" sz="1150" dirty="0"/>
-          </a:p>
-        </p:txBody>
-      </p:sp>
-      <p:sp>
-        <p:nvSpPr>
-          <p:cNvPr id="22" name="Text 20"/>
-          <p:cNvSpPr/>
-          <p:nvPr/>
-        </p:nvSpPr>
-        <p:spPr>
-          <a:xfrm>
-            <a:off x="6277356" y="4251960"/>
-            <a:ext cx="146304" cy="457200"/>
-          </a:xfrm>
-          <a:prstGeom prst="rect">
-            <a:avLst/>
-          </a:prstGeom>
-          <a:noFill/>
-          <a:ln/>
-        </p:spPr>
-        <p:txBody>
-          <a:bodyPr wrap="square" rtlCol="0" anchor="ctr"/>
-          <a:lstStyle/>
-          <a:p>
-            <a:pPr algn="ctr" indent="0" marL="0">
-              <a:buNone/>
-            </a:pPr>
-            <a:r>
-              <a:rPr lang="en-US" sz="1300" dirty="0">
-                <a:solidFill>
-                  <a:srgbClr val="6B6B6B"/>
-                </a:solidFill>
-                <a:latin typeface="Malgun Gothic" pitchFamily="34" charset="0"/>
-                <a:ea typeface="Malgun Gothic" pitchFamily="34" charset="-122"/>
-                <a:cs typeface="Malgun Gothic" pitchFamily="34" charset="-120"/>
-              </a:rPr>
-              <a:t>›</a:t>
-            </a:r>
-            <a:endParaRPr lang="en-US" sz="1300" dirty="0"/>
-          </a:p>
-        </p:txBody>
-      </p:sp>
-      <p:sp>
-        <p:nvSpPr>
-          <p:cNvPr id="23" name="Text 21"/>
-          <p:cNvSpPr/>
-          <p:nvPr/>
-        </p:nvSpPr>
-        <p:spPr>
-          <a:xfrm>
-            <a:off x="6441948" y="4251960"/>
-            <a:ext cx="1207008" cy="457200"/>
-          </a:xfrm>
-          <a:prstGeom prst="roundRect">
-            <a:avLst>
-              <a:gd name="adj" fmla="val 50000"/>
-            </a:avLst>
-          </a:prstGeom>
-          <a:solidFill>
-            <a:srgbClr val="20232E"/>
-          </a:solidFill>
-          <a:ln w="12700">
-            <a:solidFill>
-              <a:srgbClr val="33384A"/>
-            </a:solidFill>
-          </a:ln>
-        </p:spPr>
-        <p:txBody>
-          <a:bodyPr wrap="square" rtlCol="0" anchor="ctr"/>
-          <a:lstStyle/>
-          <a:p>
-            <a:pPr algn="ctr" indent="0" marL="0">
-              <a:buNone/>
-            </a:pPr>
-            <a:r>
-              <a:rPr lang="en-US" sz="1150" b="1" dirty="0">
-                <a:solidFill>
-                  <a:srgbClr val="FECA0A"/>
-                </a:solidFill>
-                <a:latin typeface="Malgun Gothic" pitchFamily="34" charset="0"/>
-                <a:ea typeface="Malgun Gothic" pitchFamily="34" charset="-122"/>
-                <a:cs typeface="Malgun Gothic" pitchFamily="34" charset="-120"/>
-              </a:rPr>
-              <a:t>04 </a:t>
-            </a:r>
-            <a:pPr algn="ctr" indent="0" marL="0">
-              <a:buNone/>
-            </a:pPr>
-            <a:r>
-              <a:rPr lang="en-US" sz="1150" b="1" dirty="0">
-                <a:solidFill>
-                  <a:srgbClr val="FFFFFF"/>
-                </a:solidFill>
-                <a:latin typeface="Malgun Gothic" pitchFamily="34" charset="0"/>
-                <a:ea typeface="Malgun Gothic" pitchFamily="34" charset="-122"/>
-                <a:cs typeface="Malgun Gothic" pitchFamily="34" charset="-120"/>
-              </a:rPr>
-              <a:t>계약</a:t>
-            </a:r>
-            <a:endParaRPr lang="en-US" sz="1150" dirty="0"/>
-          </a:p>
-        </p:txBody>
-      </p:sp>
-      <p:sp>
-        <p:nvSpPr>
-          <p:cNvPr id="24" name="Text 22"/>
-          <p:cNvSpPr/>
-          <p:nvPr/>
-        </p:nvSpPr>
-        <p:spPr>
-          <a:xfrm>
-            <a:off x="7795260" y="4251960"/>
-            <a:ext cx="146304" cy="457200"/>
-          </a:xfrm>
-          <a:prstGeom prst="rect">
-            <a:avLst/>
-          </a:prstGeom>
-          <a:noFill/>
-          <a:ln/>
-        </p:spPr>
-        <p:txBody>
-          <a:bodyPr wrap="square" rtlCol="0" anchor="ctr"/>
-          <a:lstStyle/>
-          <a:p>
-            <a:pPr algn="ctr" indent="0" marL="0">
-              <a:buNone/>
-            </a:pPr>
-            <a:r>
-              <a:rPr lang="en-US" sz="1300" dirty="0">
-                <a:solidFill>
-                  <a:srgbClr val="6B6B6B"/>
-                </a:solidFill>
-                <a:latin typeface="Malgun Gothic" pitchFamily="34" charset="0"/>
-                <a:ea typeface="Malgun Gothic" pitchFamily="34" charset="-122"/>
-                <a:cs typeface="Malgun Gothic" pitchFamily="34" charset="-120"/>
-              </a:rPr>
-              <a:t>›</a:t>
-            </a:r>
-            <a:endParaRPr lang="en-US" sz="1300" dirty="0"/>
-          </a:p>
-        </p:txBody>
-      </p:sp>
-      <p:sp>
-        <p:nvSpPr>
-          <p:cNvPr id="25" name="Text 23"/>
-          <p:cNvSpPr/>
-          <p:nvPr/>
-        </p:nvSpPr>
-        <p:spPr>
-          <a:xfrm>
-            <a:off x="7959852" y="4251960"/>
-            <a:ext cx="1207008" cy="457200"/>
-          </a:xfrm>
-          <a:prstGeom prst="roundRect">
-            <a:avLst>
-              <a:gd name="adj" fmla="val 50000"/>
-            </a:avLst>
-          </a:prstGeom>
-          <a:solidFill>
-            <a:srgbClr val="20232E"/>
-          </a:solidFill>
-          <a:ln w="12700">
-            <a:solidFill>
-              <a:srgbClr val="33384A"/>
-            </a:solidFill>
-          </a:ln>
-        </p:spPr>
-        <p:txBody>
-          <a:bodyPr wrap="square" rtlCol="0" anchor="ctr"/>
-          <a:lstStyle/>
-          <a:p>
-            <a:pPr algn="ctr" indent="0" marL="0">
-              <a:buNone/>
-            </a:pPr>
-            <a:r>
-              <a:rPr lang="en-US" sz="1150" b="1" dirty="0">
-                <a:solidFill>
-                  <a:srgbClr val="FECA0A"/>
-                </a:solidFill>
-                <a:latin typeface="Malgun Gothic" pitchFamily="34" charset="0"/>
-                <a:ea typeface="Malgun Gothic" pitchFamily="34" charset="-122"/>
-                <a:cs typeface="Malgun Gothic" pitchFamily="34" charset="-120"/>
-              </a:rPr>
-              <a:t>05 </a:t>
-            </a:r>
-            <a:pPr algn="ctr" indent="0" marL="0">
-              <a:buNone/>
-            </a:pPr>
-            <a:r>
-              <a:rPr lang="en-US" sz="1150" b="1" dirty="0">
-                <a:solidFill>
-                  <a:srgbClr val="FFFFFF"/>
-                </a:solidFill>
-                <a:latin typeface="Malgun Gothic" pitchFamily="34" charset="0"/>
-                <a:ea typeface="Malgun Gothic" pitchFamily="34" charset="-122"/>
-                <a:cs typeface="Malgun Gothic" pitchFamily="34" charset="-120"/>
-              </a:rPr>
-              <a:t>교육</a:t>
-            </a:r>
-            <a:endParaRPr lang="en-US" sz="1150" dirty="0"/>
-          </a:p>
-        </p:txBody>
-      </p:sp>
-      <p:sp>
-        <p:nvSpPr>
-          <p:cNvPr id="26" name="Text 24"/>
-          <p:cNvSpPr/>
-          <p:nvPr/>
-        </p:nvSpPr>
-        <p:spPr>
-          <a:xfrm>
-            <a:off x="9313164" y="4251960"/>
-            <a:ext cx="146304" cy="457200"/>
-          </a:xfrm>
-          <a:prstGeom prst="rect">
-            <a:avLst/>
-          </a:prstGeom>
-          <a:noFill/>
-          <a:ln/>
-        </p:spPr>
-        <p:txBody>
-          <a:bodyPr wrap="square" rtlCol="0" anchor="ctr"/>
-          <a:lstStyle/>
-          <a:p>
-            <a:pPr algn="ctr" indent="0" marL="0">
-              <a:buNone/>
-            </a:pPr>
-            <a:r>
-              <a:rPr lang="en-US" sz="1300" dirty="0">
-                <a:solidFill>
-                  <a:srgbClr val="6B6B6B"/>
-                </a:solidFill>
-                <a:latin typeface="Malgun Gothic" pitchFamily="34" charset="0"/>
-                <a:ea typeface="Malgun Gothic" pitchFamily="34" charset="-122"/>
-                <a:cs typeface="Malgun Gothic" pitchFamily="34" charset="-120"/>
-              </a:rPr>
-              <a:t>›</a:t>
-            </a:r>
-            <a:endParaRPr lang="en-US" sz="1300" dirty="0"/>
-          </a:p>
-        </p:txBody>
-      </p:sp>
-      <p:sp>
-        <p:nvSpPr>
-          <p:cNvPr id="27" name="Text 25"/>
-          <p:cNvSpPr/>
-          <p:nvPr/>
-        </p:nvSpPr>
-        <p:spPr>
-          <a:xfrm>
-            <a:off x="9477756" y="4251960"/>
-            <a:ext cx="1207008" cy="457200"/>
-          </a:xfrm>
-          <a:prstGeom prst="roundRect">
-            <a:avLst>
-              <a:gd name="adj" fmla="val 50000"/>
-            </a:avLst>
-          </a:prstGeom>
-          <a:solidFill>
-            <a:srgbClr val="20232E"/>
-          </a:solidFill>
-          <a:ln w="12700">
-            <a:solidFill>
-              <a:srgbClr val="33384A"/>
-            </a:solidFill>
-          </a:ln>
-        </p:spPr>
-        <p:txBody>
-          <a:bodyPr wrap="square" rtlCol="0" anchor="ctr"/>
-          <a:lstStyle/>
-          <a:p>
-            <a:pPr algn="ctr" indent="0" marL="0">
-              <a:buNone/>
-            </a:pPr>
-            <a:r>
-              <a:rPr lang="en-US" sz="1150" b="1" dirty="0">
-                <a:solidFill>
-                  <a:srgbClr val="FECA0A"/>
-                </a:solidFill>
-                <a:latin typeface="Malgun Gothic" pitchFamily="34" charset="0"/>
-                <a:ea typeface="Malgun Gothic" pitchFamily="34" charset="-122"/>
-                <a:cs typeface="Malgun Gothic" pitchFamily="34" charset="-120"/>
-              </a:rPr>
-              <a:t>06 </a:t>
-            </a:r>
-            <a:pPr algn="ctr" indent="0" marL="0">
-              <a:buNone/>
-            </a:pPr>
-            <a:r>
-              <a:rPr lang="en-US" sz="1150" b="1" dirty="0">
-                <a:solidFill>
-                  <a:srgbClr val="FFFFFF"/>
-                </a:solidFill>
-                <a:latin typeface="Malgun Gothic" pitchFamily="34" charset="0"/>
-                <a:ea typeface="Malgun Gothic" pitchFamily="34" charset="-122"/>
-                <a:cs typeface="Malgun Gothic" pitchFamily="34" charset="-120"/>
-              </a:rPr>
-              <a:t>오픈</a:t>
+              <a:t>본사 직영 노하우 전수</a:t>
             </a:r>
             <a:endParaRPr lang="en-US" sz="1150" dirty="0"/>
           </a:p>
@@ -4583,6 +4580,1151 @@
 <file path=ppt/slides/slide13.xml><?xml version="1.0" encoding="utf-8"?>
 <p:sld xmlns:a="http://schemas.openxmlformats.org/drawingml/2006/main" xmlns:r="http://schemas.openxmlformats.org/officeDocument/2006/relationships" xmlns:p="http://schemas.openxmlformats.org/presentationml/2006/main">
   <p:cSld name="Slide 13">
+    <p:bg>
+      <p:bgPr>
+        <a:solidFill>
+          <a:srgbClr val="12141B"/>
+        </a:solidFill>
+      </p:bgPr>
+    </p:bg>
+    <p:spTree>
+      <p:nvGrpSpPr>
+        <p:cNvPr id="1" name=""/>
+        <p:cNvGrpSpPr/>
+        <p:nvPr/>
+      </p:nvGrpSpPr>
+      <p:grpSpPr>
+        <a:xfrm>
+          <a:off x="0" y="0"/>
+          <a:ext cx="0" cy="0"/>
+          <a:chOff x="0" y="0"/>
+          <a:chExt cx="0" cy="0"/>
+        </a:xfrm>
+      </p:grpSpPr>
+      <p:sp>
+        <p:nvSpPr>
+          <p:cNvPr id="2" name="Shape 0"/>
+          <p:cNvSpPr/>
+          <p:nvPr/>
+        </p:nvSpPr>
+        <p:spPr>
+          <a:xfrm>
+            <a:off x="7955280" y="-2194560"/>
+            <a:ext cx="5943600" cy="5943600"/>
+          </a:xfrm>
+          <a:prstGeom prst="ellipse">
+            <a:avLst/>
+          </a:prstGeom>
+          <a:solidFill>
+            <a:srgbClr val="2A2350">
+              <a:alpha val="45000"/>
+            </a:srgbClr>
+          </a:solidFill>
+          <a:ln/>
+        </p:spPr>
+      </p:sp>
+      <p:sp>
+        <p:nvSpPr>
+          <p:cNvPr id="3" name="Text 1"/>
+          <p:cNvSpPr/>
+          <p:nvPr/>
+        </p:nvSpPr>
+        <p:spPr>
+          <a:xfrm>
+            <a:off x="777240" y="566928"/>
+            <a:ext cx="10637215" cy="365760"/>
+          </a:xfrm>
+          <a:prstGeom prst="rect">
+            <a:avLst/>
+          </a:prstGeom>
+          <a:noFill/>
+          <a:ln/>
+        </p:spPr>
+        <p:txBody>
+          <a:bodyPr wrap="square" rtlCol="0" anchor="ctr"/>
+          <a:lstStyle/>
+          <a:p>
+            <a:pPr indent="0" marL="0">
+              <a:buNone/>
+            </a:pPr>
+            <a:r>
+              <a:rPr lang="en-US" sz="1100" b="1" spc="200" kern="0" dirty="0">
+                <a:solidFill>
+                  <a:srgbClr val="FECA0A"/>
+                </a:solidFill>
+                <a:latin typeface="Malgun Gothic" pitchFamily="34" charset="0"/>
+                <a:ea typeface="Malgun Gothic" pitchFamily="34" charset="-122"/>
+                <a:cs typeface="Malgun Gothic" pitchFamily="34" charset="-120"/>
+              </a:rPr>
+              <a:t>가맹 지원 · 절차</a:t>
+            </a:r>
+            <a:endParaRPr lang="en-US" sz="1100" dirty="0"/>
+          </a:p>
+        </p:txBody>
+      </p:sp>
+      <p:sp>
+        <p:nvSpPr>
+          <p:cNvPr id="4" name="Text 2"/>
+          <p:cNvSpPr/>
+          <p:nvPr/>
+        </p:nvSpPr>
+        <p:spPr>
+          <a:xfrm>
+            <a:off x="777240" y="960120"/>
+            <a:ext cx="10637215" cy="1097280"/>
+          </a:xfrm>
+          <a:prstGeom prst="rect">
+            <a:avLst/>
+          </a:prstGeom>
+          <a:noFill/>
+          <a:ln/>
+        </p:spPr>
+        <p:txBody>
+          <a:bodyPr wrap="square" rtlCol="0" anchor="ctr"/>
+          <a:lstStyle/>
+          <a:p>
+            <a:pPr indent="0" marL="0">
+              <a:lnSpc>
+                <a:spcPct val="105000"/>
+              </a:lnSpc>
+              <a:buNone/>
+            </a:pPr>
+            <a:r>
+              <a:rPr lang="en-US" sz="3200" b="1" dirty="0">
+                <a:solidFill>
+                  <a:srgbClr val="FFFFFF"/>
+                </a:solidFill>
+                <a:latin typeface="Malgun Gothic" pitchFamily="34" charset="0"/>
+                <a:ea typeface="Malgun Gothic" pitchFamily="34" charset="-122"/>
+                <a:cs typeface="Malgun Gothic" pitchFamily="34" charset="-120"/>
+              </a:rPr>
+              <a:t>오픈부터 운영까지 </a:t>
+            </a:r>
+            <a:pPr indent="0" marL="0">
+              <a:lnSpc>
+                <a:spcPct val="105000"/>
+              </a:lnSpc>
+              <a:buNone/>
+            </a:pPr>
+            <a:r>
+              <a:rPr lang="en-US" sz="3200" b="1" dirty="0">
+                <a:solidFill>
+                  <a:srgbClr val="FECA0A"/>
+                </a:solidFill>
+                <a:latin typeface="Malgun Gothic" pitchFamily="34" charset="0"/>
+                <a:ea typeface="Malgun Gothic" pitchFamily="34" charset="-122"/>
+                <a:cs typeface="Malgun Gothic" pitchFamily="34" charset="-120"/>
+              </a:rPr>
+              <a:t>함께</a:t>
+            </a:r>
+            <a:endParaRPr lang="en-US" sz="3200" dirty="0"/>
+          </a:p>
+        </p:txBody>
+      </p:sp>
+      <p:sp>
+        <p:nvSpPr>
+          <p:cNvPr id="5" name="Shape 3"/>
+          <p:cNvSpPr/>
+          <p:nvPr/>
+        </p:nvSpPr>
+        <p:spPr>
+          <a:xfrm>
+            <a:off x="777240" y="2286000"/>
+            <a:ext cx="2467280" cy="1554480"/>
+          </a:xfrm>
+          <a:prstGeom prst="roundRect">
+            <a:avLst>
+              <a:gd name="adj" fmla="val 5294"/>
+            </a:avLst>
+          </a:prstGeom>
+          <a:solidFill>
+            <a:srgbClr val="20232E"/>
+          </a:solidFill>
+          <a:ln w="12700">
+            <a:solidFill>
+              <a:srgbClr val="33384A"/>
+            </a:solidFill>
+            <a:prstDash val="solid"/>
+          </a:ln>
+        </p:spPr>
+      </p:sp>
+      <p:sp>
+        <p:nvSpPr>
+          <p:cNvPr id="6" name="Text 4"/>
+          <p:cNvSpPr/>
+          <p:nvPr/>
+        </p:nvSpPr>
+        <p:spPr>
+          <a:xfrm>
+            <a:off x="1014984" y="2487168"/>
+            <a:ext cx="1991792" cy="365760"/>
+          </a:xfrm>
+          <a:prstGeom prst="rect">
+            <a:avLst/>
+          </a:prstGeom>
+          <a:noFill/>
+          <a:ln/>
+        </p:spPr>
+        <p:txBody>
+          <a:bodyPr wrap="square" rtlCol="0" anchor="ctr"/>
+          <a:lstStyle/>
+          <a:p>
+            <a:pPr indent="0" marL="0">
+              <a:buNone/>
+            </a:pPr>
+            <a:r>
+              <a:rPr lang="en-US" sz="1450" b="1" dirty="0">
+                <a:solidFill>
+                  <a:srgbClr val="FFFFFF"/>
+                </a:solidFill>
+                <a:latin typeface="Malgun Gothic" pitchFamily="34" charset="0"/>
+                <a:ea typeface="Malgun Gothic" pitchFamily="34" charset="-122"/>
+                <a:cs typeface="Malgun Gothic" pitchFamily="34" charset="-120"/>
+              </a:rPr>
+              <a:t>오픈 지원</a:t>
+            </a:r>
+            <a:endParaRPr lang="en-US" sz="1450" dirty="0"/>
+          </a:p>
+        </p:txBody>
+      </p:sp>
+      <p:sp>
+        <p:nvSpPr>
+          <p:cNvPr id="7" name="Text 5"/>
+          <p:cNvSpPr/>
+          <p:nvPr/>
+        </p:nvSpPr>
+        <p:spPr>
+          <a:xfrm>
+            <a:off x="1014984" y="2907792"/>
+            <a:ext cx="1991792" cy="768096"/>
+          </a:xfrm>
+          <a:prstGeom prst="rect">
+            <a:avLst/>
+          </a:prstGeom>
+          <a:noFill/>
+          <a:ln/>
+        </p:spPr>
+        <p:txBody>
+          <a:bodyPr wrap="square" rtlCol="0" anchor="t"/>
+          <a:lstStyle/>
+          <a:p>
+            <a:pPr indent="0" marL="0">
+              <a:lnSpc>
+                <a:spcPct val="118000"/>
+              </a:lnSpc>
+              <a:buNone/>
+            </a:pPr>
+            <a:r>
+              <a:rPr lang="en-US" sz="1150" dirty="0">
+                <a:solidFill>
+                  <a:srgbClr val="C7C7D4"/>
+                </a:solidFill>
+                <a:latin typeface="Malgun Gothic" pitchFamily="34" charset="0"/>
+                <a:ea typeface="Malgun Gothic" pitchFamily="34" charset="-122"/>
+                <a:cs typeface="Malgun Gothic" pitchFamily="34" charset="-120"/>
+              </a:rPr>
+              <a:t>상권분석·인테리어 가이드</a:t>
+            </a:r>
+            <a:endParaRPr lang="en-US" sz="1150" dirty="0"/>
+          </a:p>
+        </p:txBody>
+      </p:sp>
+      <p:sp>
+        <p:nvSpPr>
+          <p:cNvPr id="8" name="Shape 6"/>
+          <p:cNvSpPr/>
+          <p:nvPr/>
+        </p:nvSpPr>
+        <p:spPr>
+          <a:xfrm>
+            <a:off x="3500552" y="2286000"/>
+            <a:ext cx="2467280" cy="1554480"/>
+          </a:xfrm>
+          <a:prstGeom prst="roundRect">
+            <a:avLst>
+              <a:gd name="adj" fmla="val 5294"/>
+            </a:avLst>
+          </a:prstGeom>
+          <a:solidFill>
+            <a:srgbClr val="20232E"/>
+          </a:solidFill>
+          <a:ln w="12700">
+            <a:solidFill>
+              <a:srgbClr val="33384A"/>
+            </a:solidFill>
+            <a:prstDash val="solid"/>
+          </a:ln>
+        </p:spPr>
+      </p:sp>
+      <p:sp>
+        <p:nvSpPr>
+          <p:cNvPr id="9" name="Text 7"/>
+          <p:cNvSpPr/>
+          <p:nvPr/>
+        </p:nvSpPr>
+        <p:spPr>
+          <a:xfrm>
+            <a:off x="3738296" y="2487168"/>
+            <a:ext cx="1991792" cy="365760"/>
+          </a:xfrm>
+          <a:prstGeom prst="rect">
+            <a:avLst/>
+          </a:prstGeom>
+          <a:noFill/>
+          <a:ln/>
+        </p:spPr>
+        <p:txBody>
+          <a:bodyPr wrap="square" rtlCol="0" anchor="ctr"/>
+          <a:lstStyle/>
+          <a:p>
+            <a:pPr indent="0" marL="0">
+              <a:buNone/>
+            </a:pPr>
+            <a:r>
+              <a:rPr lang="en-US" sz="1450" b="1" dirty="0">
+                <a:solidFill>
+                  <a:srgbClr val="FFFFFF"/>
+                </a:solidFill>
+                <a:latin typeface="Malgun Gothic" pitchFamily="34" charset="0"/>
+                <a:ea typeface="Malgun Gothic" pitchFamily="34" charset="-122"/>
+                <a:cs typeface="Malgun Gothic" pitchFamily="34" charset="-120"/>
+              </a:rPr>
+              <a:t>강사 교육</a:t>
+            </a:r>
+            <a:endParaRPr lang="en-US" sz="1450" dirty="0"/>
+          </a:p>
+        </p:txBody>
+      </p:sp>
+      <p:sp>
+        <p:nvSpPr>
+          <p:cNvPr id="10" name="Text 8"/>
+          <p:cNvSpPr/>
+          <p:nvPr/>
+        </p:nvSpPr>
+        <p:spPr>
+          <a:xfrm>
+            <a:off x="3738296" y="2907792"/>
+            <a:ext cx="1991792" cy="768096"/>
+          </a:xfrm>
+          <a:prstGeom prst="rect">
+            <a:avLst/>
+          </a:prstGeom>
+          <a:noFill/>
+          <a:ln/>
+        </p:spPr>
+        <p:txBody>
+          <a:bodyPr wrap="square" rtlCol="0" anchor="t"/>
+          <a:lstStyle/>
+          <a:p>
+            <a:pPr indent="0" marL="0">
+              <a:lnSpc>
+                <a:spcPct val="118000"/>
+              </a:lnSpc>
+              <a:buNone/>
+            </a:pPr>
+            <a:r>
+              <a:rPr lang="en-US" sz="1150" dirty="0">
+                <a:solidFill>
+                  <a:srgbClr val="C7C7D4"/>
+                </a:solidFill>
+                <a:latin typeface="Malgun Gothic" pitchFamily="34" charset="0"/>
+                <a:ea typeface="Malgun Gothic" pitchFamily="34" charset="-122"/>
+                <a:cs typeface="Malgun Gothic" pitchFamily="34" charset="-120"/>
+              </a:rPr>
+              <a:t>교수법·시스템 교육</a:t>
+            </a:r>
+            <a:endParaRPr lang="en-US" sz="1150" dirty="0"/>
+          </a:p>
+        </p:txBody>
+      </p:sp>
+      <p:sp>
+        <p:nvSpPr>
+          <p:cNvPr id="11" name="Shape 9"/>
+          <p:cNvSpPr/>
+          <p:nvPr/>
+        </p:nvSpPr>
+        <p:spPr>
+          <a:xfrm>
+            <a:off x="6223864" y="2286000"/>
+            <a:ext cx="2467280" cy="1554480"/>
+          </a:xfrm>
+          <a:prstGeom prst="roundRect">
+            <a:avLst>
+              <a:gd name="adj" fmla="val 5294"/>
+            </a:avLst>
+          </a:prstGeom>
+          <a:solidFill>
+            <a:srgbClr val="20232E"/>
+          </a:solidFill>
+          <a:ln w="12700">
+            <a:solidFill>
+              <a:srgbClr val="33384A"/>
+            </a:solidFill>
+            <a:prstDash val="solid"/>
+          </a:ln>
+        </p:spPr>
+      </p:sp>
+      <p:sp>
+        <p:nvSpPr>
+          <p:cNvPr id="12" name="Text 10"/>
+          <p:cNvSpPr/>
+          <p:nvPr/>
+        </p:nvSpPr>
+        <p:spPr>
+          <a:xfrm>
+            <a:off x="6461608" y="2487168"/>
+            <a:ext cx="1991792" cy="365760"/>
+          </a:xfrm>
+          <a:prstGeom prst="rect">
+            <a:avLst/>
+          </a:prstGeom>
+          <a:noFill/>
+          <a:ln/>
+        </p:spPr>
+        <p:txBody>
+          <a:bodyPr wrap="square" rtlCol="0" anchor="ctr"/>
+          <a:lstStyle/>
+          <a:p>
+            <a:pPr indent="0" marL="0">
+              <a:buNone/>
+            </a:pPr>
+            <a:r>
+              <a:rPr lang="en-US" sz="1450" b="1" dirty="0">
+                <a:solidFill>
+                  <a:srgbClr val="FFFFFF"/>
+                </a:solidFill>
+                <a:latin typeface="Malgun Gothic" pitchFamily="34" charset="0"/>
+                <a:ea typeface="Malgun Gothic" pitchFamily="34" charset="-122"/>
+                <a:cs typeface="Malgun Gothic" pitchFamily="34" charset="-120"/>
+              </a:rPr>
+              <a:t>마케팅</a:t>
+            </a:r>
+            <a:endParaRPr lang="en-US" sz="1450" dirty="0"/>
+          </a:p>
+        </p:txBody>
+      </p:sp>
+      <p:sp>
+        <p:nvSpPr>
+          <p:cNvPr id="13" name="Text 11"/>
+          <p:cNvSpPr/>
+          <p:nvPr/>
+        </p:nvSpPr>
+        <p:spPr>
+          <a:xfrm>
+            <a:off x="6461608" y="2907792"/>
+            <a:ext cx="1991792" cy="768096"/>
+          </a:xfrm>
+          <a:prstGeom prst="rect">
+            <a:avLst/>
+          </a:prstGeom>
+          <a:noFill/>
+          <a:ln/>
+        </p:spPr>
+        <p:txBody>
+          <a:bodyPr wrap="square" rtlCol="0" anchor="t"/>
+          <a:lstStyle/>
+          <a:p>
+            <a:pPr indent="0" marL="0">
+              <a:lnSpc>
+                <a:spcPct val="118000"/>
+              </a:lnSpc>
+              <a:buNone/>
+            </a:pPr>
+            <a:r>
+              <a:rPr lang="en-US" sz="1150" dirty="0">
+                <a:solidFill>
+                  <a:srgbClr val="C7C7D4"/>
+                </a:solidFill>
+                <a:latin typeface="Malgun Gothic" pitchFamily="34" charset="0"/>
+                <a:ea typeface="Malgun Gothic" pitchFamily="34" charset="-122"/>
+                <a:cs typeface="Malgun Gothic" pitchFamily="34" charset="-120"/>
+              </a:rPr>
+              <a:t>브랜드·지역 홍보 지원</a:t>
+            </a:r>
+            <a:endParaRPr lang="en-US" sz="1150" dirty="0"/>
+          </a:p>
+        </p:txBody>
+      </p:sp>
+      <p:sp>
+        <p:nvSpPr>
+          <p:cNvPr id="14" name="Shape 12"/>
+          <p:cNvSpPr/>
+          <p:nvPr/>
+        </p:nvSpPr>
+        <p:spPr>
+          <a:xfrm>
+            <a:off x="8947175" y="2286000"/>
+            <a:ext cx="2467280" cy="1554480"/>
+          </a:xfrm>
+          <a:prstGeom prst="roundRect">
+            <a:avLst>
+              <a:gd name="adj" fmla="val 5294"/>
+            </a:avLst>
+          </a:prstGeom>
+          <a:solidFill>
+            <a:srgbClr val="20232E"/>
+          </a:solidFill>
+          <a:ln w="12700">
+            <a:solidFill>
+              <a:srgbClr val="33384A"/>
+            </a:solidFill>
+            <a:prstDash val="solid"/>
+          </a:ln>
+        </p:spPr>
+      </p:sp>
+      <p:sp>
+        <p:nvSpPr>
+          <p:cNvPr id="15" name="Text 13"/>
+          <p:cNvSpPr/>
+          <p:nvPr/>
+        </p:nvSpPr>
+        <p:spPr>
+          <a:xfrm>
+            <a:off x="9184919" y="2487168"/>
+            <a:ext cx="1991792" cy="365760"/>
+          </a:xfrm>
+          <a:prstGeom prst="rect">
+            <a:avLst/>
+          </a:prstGeom>
+          <a:noFill/>
+          <a:ln/>
+        </p:spPr>
+        <p:txBody>
+          <a:bodyPr wrap="square" rtlCol="0" anchor="ctr"/>
+          <a:lstStyle/>
+          <a:p>
+            <a:pPr indent="0" marL="0">
+              <a:buNone/>
+            </a:pPr>
+            <a:r>
+              <a:rPr lang="en-US" sz="1450" b="1" dirty="0">
+                <a:solidFill>
+                  <a:srgbClr val="FFFFFF"/>
+                </a:solidFill>
+                <a:latin typeface="Malgun Gothic" pitchFamily="34" charset="0"/>
+                <a:ea typeface="Malgun Gothic" pitchFamily="34" charset="-122"/>
+                <a:cs typeface="Malgun Gothic" pitchFamily="34" charset="-120"/>
+              </a:rPr>
+              <a:t>슈퍼바이징</a:t>
+            </a:r>
+            <a:endParaRPr lang="en-US" sz="1450" dirty="0"/>
+          </a:p>
+        </p:txBody>
+      </p:sp>
+      <p:sp>
+        <p:nvSpPr>
+          <p:cNvPr id="16" name="Text 14"/>
+          <p:cNvSpPr/>
+          <p:nvPr/>
+        </p:nvSpPr>
+        <p:spPr>
+          <a:xfrm>
+            <a:off x="9184919" y="2907792"/>
+            <a:ext cx="1991792" cy="768096"/>
+          </a:xfrm>
+          <a:prstGeom prst="rect">
+            <a:avLst/>
+          </a:prstGeom>
+          <a:noFill/>
+          <a:ln/>
+        </p:spPr>
+        <p:txBody>
+          <a:bodyPr wrap="square" rtlCol="0" anchor="t"/>
+          <a:lstStyle/>
+          <a:p>
+            <a:pPr indent="0" marL="0">
+              <a:lnSpc>
+                <a:spcPct val="118000"/>
+              </a:lnSpc>
+              <a:buNone/>
+            </a:pPr>
+            <a:r>
+              <a:rPr lang="en-US" sz="1150" dirty="0">
+                <a:solidFill>
+                  <a:srgbClr val="C7C7D4"/>
+                </a:solidFill>
+                <a:latin typeface="Malgun Gothic" pitchFamily="34" charset="0"/>
+                <a:ea typeface="Malgun Gothic" pitchFamily="34" charset="-122"/>
+                <a:cs typeface="Malgun Gothic" pitchFamily="34" charset="-120"/>
+              </a:rPr>
+              <a:t>정기 운영 컨설팅</a:t>
+            </a:r>
+            <a:endParaRPr lang="en-US" sz="1150" dirty="0"/>
+          </a:p>
+        </p:txBody>
+      </p:sp>
+      <p:sp>
+        <p:nvSpPr>
+          <p:cNvPr id="17" name="Text 15"/>
+          <p:cNvSpPr/>
+          <p:nvPr/>
+        </p:nvSpPr>
+        <p:spPr>
+          <a:xfrm>
+            <a:off x="777240" y="4251960"/>
+            <a:ext cx="1577340" cy="457200"/>
+          </a:xfrm>
+          <a:prstGeom prst="roundRect">
+            <a:avLst>
+              <a:gd name="adj" fmla="val 50000"/>
+            </a:avLst>
+          </a:prstGeom>
+          <a:solidFill>
+            <a:srgbClr val="20232E"/>
+          </a:solidFill>
+          <a:ln w="12700">
+            <a:solidFill>
+              <a:srgbClr val="33384A"/>
+            </a:solidFill>
+          </a:ln>
+        </p:spPr>
+        <p:txBody>
+          <a:bodyPr wrap="square" rtlCol="0" anchor="ctr"/>
+          <a:lstStyle/>
+          <a:p>
+            <a:pPr algn="ctr" indent="0" marL="0">
+              <a:buNone/>
+            </a:pPr>
+            <a:r>
+              <a:rPr lang="en-US" sz="1150" b="1" dirty="0">
+                <a:solidFill>
+                  <a:srgbClr val="FECA0A"/>
+                </a:solidFill>
+                <a:latin typeface="Malgun Gothic" pitchFamily="34" charset="0"/>
+                <a:ea typeface="Malgun Gothic" pitchFamily="34" charset="-122"/>
+                <a:cs typeface="Malgun Gothic" pitchFamily="34" charset="-120"/>
+              </a:rPr>
+              <a:t>01 </a:t>
+            </a:r>
+            <a:pPr algn="ctr" indent="0" marL="0">
+              <a:buNone/>
+            </a:pPr>
+            <a:r>
+              <a:rPr lang="en-US" sz="1150" b="1" dirty="0">
+                <a:solidFill>
+                  <a:srgbClr val="FFFFFF"/>
+                </a:solidFill>
+                <a:latin typeface="Malgun Gothic" pitchFamily="34" charset="0"/>
+                <a:ea typeface="Malgun Gothic" pitchFamily="34" charset="-122"/>
+                <a:cs typeface="Malgun Gothic" pitchFamily="34" charset="-120"/>
+              </a:rPr>
+              <a:t>가맹 문의</a:t>
+            </a:r>
+            <a:endParaRPr lang="en-US" sz="1150" dirty="0"/>
+          </a:p>
+        </p:txBody>
+      </p:sp>
+      <p:sp>
+        <p:nvSpPr>
+          <p:cNvPr id="18" name="Text 16"/>
+          <p:cNvSpPr/>
+          <p:nvPr/>
+        </p:nvSpPr>
+        <p:spPr>
+          <a:xfrm>
+            <a:off x="2500884" y="4251960"/>
+            <a:ext cx="146304" cy="457200"/>
+          </a:xfrm>
+          <a:prstGeom prst="rect">
+            <a:avLst/>
+          </a:prstGeom>
+          <a:noFill/>
+          <a:ln/>
+        </p:spPr>
+        <p:txBody>
+          <a:bodyPr wrap="square" rtlCol="0" anchor="ctr"/>
+          <a:lstStyle/>
+          <a:p>
+            <a:pPr algn="ctr" indent="0" marL="0">
+              <a:buNone/>
+            </a:pPr>
+            <a:r>
+              <a:rPr lang="en-US" sz="1300" dirty="0">
+                <a:solidFill>
+                  <a:srgbClr val="6B6B6B"/>
+                </a:solidFill>
+                <a:latin typeface="Malgun Gothic" pitchFamily="34" charset="0"/>
+                <a:ea typeface="Malgun Gothic" pitchFamily="34" charset="-122"/>
+                <a:cs typeface="Malgun Gothic" pitchFamily="34" charset="-120"/>
+              </a:rPr>
+              <a:t>›</a:t>
+            </a:r>
+            <a:endParaRPr lang="en-US" sz="1300" dirty="0"/>
+          </a:p>
+        </p:txBody>
+      </p:sp>
+      <p:sp>
+        <p:nvSpPr>
+          <p:cNvPr id="19" name="Text 17"/>
+          <p:cNvSpPr/>
+          <p:nvPr/>
+        </p:nvSpPr>
+        <p:spPr>
+          <a:xfrm>
+            <a:off x="2665476" y="4251960"/>
+            <a:ext cx="1577340" cy="457200"/>
+          </a:xfrm>
+          <a:prstGeom prst="roundRect">
+            <a:avLst>
+              <a:gd name="adj" fmla="val 50000"/>
+            </a:avLst>
+          </a:prstGeom>
+          <a:solidFill>
+            <a:srgbClr val="20232E"/>
+          </a:solidFill>
+          <a:ln w="12700">
+            <a:solidFill>
+              <a:srgbClr val="33384A"/>
+            </a:solidFill>
+          </a:ln>
+        </p:spPr>
+        <p:txBody>
+          <a:bodyPr wrap="square" rtlCol="0" anchor="ctr"/>
+          <a:lstStyle/>
+          <a:p>
+            <a:pPr algn="ctr" indent="0" marL="0">
+              <a:buNone/>
+            </a:pPr>
+            <a:r>
+              <a:rPr lang="en-US" sz="1150" b="1" dirty="0">
+                <a:solidFill>
+                  <a:srgbClr val="FECA0A"/>
+                </a:solidFill>
+                <a:latin typeface="Malgun Gothic" pitchFamily="34" charset="0"/>
+                <a:ea typeface="Malgun Gothic" pitchFamily="34" charset="-122"/>
+                <a:cs typeface="Malgun Gothic" pitchFamily="34" charset="-120"/>
+              </a:rPr>
+              <a:t>02 </a:t>
+            </a:r>
+            <a:pPr algn="ctr" indent="0" marL="0">
+              <a:buNone/>
+            </a:pPr>
+            <a:r>
+              <a:rPr lang="en-US" sz="1150" b="1" dirty="0">
+                <a:solidFill>
+                  <a:srgbClr val="FFFFFF"/>
+                </a:solidFill>
+                <a:latin typeface="Malgun Gothic" pitchFamily="34" charset="0"/>
+                <a:ea typeface="Malgun Gothic" pitchFamily="34" charset="-122"/>
+                <a:cs typeface="Malgun Gothic" pitchFamily="34" charset="-120"/>
+              </a:rPr>
+              <a:t>상담·설명</a:t>
+            </a:r>
+            <a:endParaRPr lang="en-US" sz="1150" dirty="0"/>
+          </a:p>
+        </p:txBody>
+      </p:sp>
+      <p:sp>
+        <p:nvSpPr>
+          <p:cNvPr id="20" name="Text 18"/>
+          <p:cNvSpPr/>
+          <p:nvPr/>
+        </p:nvSpPr>
+        <p:spPr>
+          <a:xfrm>
+            <a:off x="4389120" y="4251960"/>
+            <a:ext cx="146304" cy="457200"/>
+          </a:xfrm>
+          <a:prstGeom prst="rect">
+            <a:avLst/>
+          </a:prstGeom>
+          <a:noFill/>
+          <a:ln/>
+        </p:spPr>
+        <p:txBody>
+          <a:bodyPr wrap="square" rtlCol="0" anchor="ctr"/>
+          <a:lstStyle/>
+          <a:p>
+            <a:pPr algn="ctr" indent="0" marL="0">
+              <a:buNone/>
+            </a:pPr>
+            <a:r>
+              <a:rPr lang="en-US" sz="1300" dirty="0">
+                <a:solidFill>
+                  <a:srgbClr val="6B6B6B"/>
+                </a:solidFill>
+                <a:latin typeface="Malgun Gothic" pitchFamily="34" charset="0"/>
+                <a:ea typeface="Malgun Gothic" pitchFamily="34" charset="-122"/>
+                <a:cs typeface="Malgun Gothic" pitchFamily="34" charset="-120"/>
+              </a:rPr>
+              <a:t>›</a:t>
+            </a:r>
+            <a:endParaRPr lang="en-US" sz="1300" dirty="0"/>
+          </a:p>
+        </p:txBody>
+      </p:sp>
+      <p:sp>
+        <p:nvSpPr>
+          <p:cNvPr id="21" name="Text 19"/>
+          <p:cNvSpPr/>
+          <p:nvPr/>
+        </p:nvSpPr>
+        <p:spPr>
+          <a:xfrm>
+            <a:off x="4553712" y="4251960"/>
+            <a:ext cx="1577340" cy="457200"/>
+          </a:xfrm>
+          <a:prstGeom prst="roundRect">
+            <a:avLst>
+              <a:gd name="adj" fmla="val 50000"/>
+            </a:avLst>
+          </a:prstGeom>
+          <a:solidFill>
+            <a:srgbClr val="20232E"/>
+          </a:solidFill>
+          <a:ln w="12700">
+            <a:solidFill>
+              <a:srgbClr val="33384A"/>
+            </a:solidFill>
+          </a:ln>
+        </p:spPr>
+        <p:txBody>
+          <a:bodyPr wrap="square" rtlCol="0" anchor="ctr"/>
+          <a:lstStyle/>
+          <a:p>
+            <a:pPr algn="ctr" indent="0" marL="0">
+              <a:buNone/>
+            </a:pPr>
+            <a:r>
+              <a:rPr lang="en-US" sz="1150" b="1" dirty="0">
+                <a:solidFill>
+                  <a:srgbClr val="FECA0A"/>
+                </a:solidFill>
+                <a:latin typeface="Malgun Gothic" pitchFamily="34" charset="0"/>
+                <a:ea typeface="Malgun Gothic" pitchFamily="34" charset="-122"/>
+                <a:cs typeface="Malgun Gothic" pitchFamily="34" charset="-120"/>
+              </a:rPr>
+              <a:t>03 </a:t>
+            </a:r>
+            <a:pPr algn="ctr" indent="0" marL="0">
+              <a:buNone/>
+            </a:pPr>
+            <a:r>
+              <a:rPr lang="en-US" sz="1150" b="1" dirty="0">
+                <a:solidFill>
+                  <a:srgbClr val="FFFFFF"/>
+                </a:solidFill>
+                <a:latin typeface="Malgun Gothic" pitchFamily="34" charset="0"/>
+                <a:ea typeface="Malgun Gothic" pitchFamily="34" charset="-122"/>
+                <a:cs typeface="Malgun Gothic" pitchFamily="34" charset="-120"/>
+              </a:rPr>
+              <a:t>상권 분석</a:t>
+            </a:r>
+            <a:endParaRPr lang="en-US" sz="1150" dirty="0"/>
+          </a:p>
+        </p:txBody>
+      </p:sp>
+      <p:sp>
+        <p:nvSpPr>
+          <p:cNvPr id="22" name="Text 20"/>
+          <p:cNvSpPr/>
+          <p:nvPr/>
+        </p:nvSpPr>
+        <p:spPr>
+          <a:xfrm>
+            <a:off x="6277356" y="4251960"/>
+            <a:ext cx="146304" cy="457200"/>
+          </a:xfrm>
+          <a:prstGeom prst="rect">
+            <a:avLst/>
+          </a:prstGeom>
+          <a:noFill/>
+          <a:ln/>
+        </p:spPr>
+        <p:txBody>
+          <a:bodyPr wrap="square" rtlCol="0" anchor="ctr"/>
+          <a:lstStyle/>
+          <a:p>
+            <a:pPr algn="ctr" indent="0" marL="0">
+              <a:buNone/>
+            </a:pPr>
+            <a:r>
+              <a:rPr lang="en-US" sz="1300" dirty="0">
+                <a:solidFill>
+                  <a:srgbClr val="6B6B6B"/>
+                </a:solidFill>
+                <a:latin typeface="Malgun Gothic" pitchFamily="34" charset="0"/>
+                <a:ea typeface="Malgun Gothic" pitchFamily="34" charset="-122"/>
+                <a:cs typeface="Malgun Gothic" pitchFamily="34" charset="-120"/>
+              </a:rPr>
+              <a:t>›</a:t>
+            </a:r>
+            <a:endParaRPr lang="en-US" sz="1300" dirty="0"/>
+          </a:p>
+        </p:txBody>
+      </p:sp>
+      <p:sp>
+        <p:nvSpPr>
+          <p:cNvPr id="23" name="Text 21"/>
+          <p:cNvSpPr/>
+          <p:nvPr/>
+        </p:nvSpPr>
+        <p:spPr>
+          <a:xfrm>
+            <a:off x="6441948" y="4251960"/>
+            <a:ext cx="1207008" cy="457200"/>
+          </a:xfrm>
+          <a:prstGeom prst="roundRect">
+            <a:avLst>
+              <a:gd name="adj" fmla="val 50000"/>
+            </a:avLst>
+          </a:prstGeom>
+          <a:solidFill>
+            <a:srgbClr val="20232E"/>
+          </a:solidFill>
+          <a:ln w="12700">
+            <a:solidFill>
+              <a:srgbClr val="33384A"/>
+            </a:solidFill>
+          </a:ln>
+        </p:spPr>
+        <p:txBody>
+          <a:bodyPr wrap="square" rtlCol="0" anchor="ctr"/>
+          <a:lstStyle/>
+          <a:p>
+            <a:pPr algn="ctr" indent="0" marL="0">
+              <a:buNone/>
+            </a:pPr>
+            <a:r>
+              <a:rPr lang="en-US" sz="1150" b="1" dirty="0">
+                <a:solidFill>
+                  <a:srgbClr val="FECA0A"/>
+                </a:solidFill>
+                <a:latin typeface="Malgun Gothic" pitchFamily="34" charset="0"/>
+                <a:ea typeface="Malgun Gothic" pitchFamily="34" charset="-122"/>
+                <a:cs typeface="Malgun Gothic" pitchFamily="34" charset="-120"/>
+              </a:rPr>
+              <a:t>04 </a:t>
+            </a:r>
+            <a:pPr algn="ctr" indent="0" marL="0">
+              <a:buNone/>
+            </a:pPr>
+            <a:r>
+              <a:rPr lang="en-US" sz="1150" b="1" dirty="0">
+                <a:solidFill>
+                  <a:srgbClr val="FFFFFF"/>
+                </a:solidFill>
+                <a:latin typeface="Malgun Gothic" pitchFamily="34" charset="0"/>
+                <a:ea typeface="Malgun Gothic" pitchFamily="34" charset="-122"/>
+                <a:cs typeface="Malgun Gothic" pitchFamily="34" charset="-120"/>
+              </a:rPr>
+              <a:t>계약</a:t>
+            </a:r>
+            <a:endParaRPr lang="en-US" sz="1150" dirty="0"/>
+          </a:p>
+        </p:txBody>
+      </p:sp>
+      <p:sp>
+        <p:nvSpPr>
+          <p:cNvPr id="24" name="Text 22"/>
+          <p:cNvSpPr/>
+          <p:nvPr/>
+        </p:nvSpPr>
+        <p:spPr>
+          <a:xfrm>
+            <a:off x="7795260" y="4251960"/>
+            <a:ext cx="146304" cy="457200"/>
+          </a:xfrm>
+          <a:prstGeom prst="rect">
+            <a:avLst/>
+          </a:prstGeom>
+          <a:noFill/>
+          <a:ln/>
+        </p:spPr>
+        <p:txBody>
+          <a:bodyPr wrap="square" rtlCol="0" anchor="ctr"/>
+          <a:lstStyle/>
+          <a:p>
+            <a:pPr algn="ctr" indent="0" marL="0">
+              <a:buNone/>
+            </a:pPr>
+            <a:r>
+              <a:rPr lang="en-US" sz="1300" dirty="0">
+                <a:solidFill>
+                  <a:srgbClr val="6B6B6B"/>
+                </a:solidFill>
+                <a:latin typeface="Malgun Gothic" pitchFamily="34" charset="0"/>
+                <a:ea typeface="Malgun Gothic" pitchFamily="34" charset="-122"/>
+                <a:cs typeface="Malgun Gothic" pitchFamily="34" charset="-120"/>
+              </a:rPr>
+              <a:t>›</a:t>
+            </a:r>
+            <a:endParaRPr lang="en-US" sz="1300" dirty="0"/>
+          </a:p>
+        </p:txBody>
+      </p:sp>
+      <p:sp>
+        <p:nvSpPr>
+          <p:cNvPr id="25" name="Text 23"/>
+          <p:cNvSpPr/>
+          <p:nvPr/>
+        </p:nvSpPr>
+        <p:spPr>
+          <a:xfrm>
+            <a:off x="7959852" y="4251960"/>
+            <a:ext cx="1207008" cy="457200"/>
+          </a:xfrm>
+          <a:prstGeom prst="roundRect">
+            <a:avLst>
+              <a:gd name="adj" fmla="val 50000"/>
+            </a:avLst>
+          </a:prstGeom>
+          <a:solidFill>
+            <a:srgbClr val="20232E"/>
+          </a:solidFill>
+          <a:ln w="12700">
+            <a:solidFill>
+              <a:srgbClr val="33384A"/>
+            </a:solidFill>
+          </a:ln>
+        </p:spPr>
+        <p:txBody>
+          <a:bodyPr wrap="square" rtlCol="0" anchor="ctr"/>
+          <a:lstStyle/>
+          <a:p>
+            <a:pPr algn="ctr" indent="0" marL="0">
+              <a:buNone/>
+            </a:pPr>
+            <a:r>
+              <a:rPr lang="en-US" sz="1150" b="1" dirty="0">
+                <a:solidFill>
+                  <a:srgbClr val="FECA0A"/>
+                </a:solidFill>
+                <a:latin typeface="Malgun Gothic" pitchFamily="34" charset="0"/>
+                <a:ea typeface="Malgun Gothic" pitchFamily="34" charset="-122"/>
+                <a:cs typeface="Malgun Gothic" pitchFamily="34" charset="-120"/>
+              </a:rPr>
+              <a:t>05 </a:t>
+            </a:r>
+            <a:pPr algn="ctr" indent="0" marL="0">
+              <a:buNone/>
+            </a:pPr>
+            <a:r>
+              <a:rPr lang="en-US" sz="1150" b="1" dirty="0">
+                <a:solidFill>
+                  <a:srgbClr val="FFFFFF"/>
+                </a:solidFill>
+                <a:latin typeface="Malgun Gothic" pitchFamily="34" charset="0"/>
+                <a:ea typeface="Malgun Gothic" pitchFamily="34" charset="-122"/>
+                <a:cs typeface="Malgun Gothic" pitchFamily="34" charset="-120"/>
+              </a:rPr>
+              <a:t>교육</a:t>
+            </a:r>
+            <a:endParaRPr lang="en-US" sz="1150" dirty="0"/>
+          </a:p>
+        </p:txBody>
+      </p:sp>
+      <p:sp>
+        <p:nvSpPr>
+          <p:cNvPr id="26" name="Text 24"/>
+          <p:cNvSpPr/>
+          <p:nvPr/>
+        </p:nvSpPr>
+        <p:spPr>
+          <a:xfrm>
+            <a:off x="9313164" y="4251960"/>
+            <a:ext cx="146304" cy="457200"/>
+          </a:xfrm>
+          <a:prstGeom prst="rect">
+            <a:avLst/>
+          </a:prstGeom>
+          <a:noFill/>
+          <a:ln/>
+        </p:spPr>
+        <p:txBody>
+          <a:bodyPr wrap="square" rtlCol="0" anchor="ctr"/>
+          <a:lstStyle/>
+          <a:p>
+            <a:pPr algn="ctr" indent="0" marL="0">
+              <a:buNone/>
+            </a:pPr>
+            <a:r>
+              <a:rPr lang="en-US" sz="1300" dirty="0">
+                <a:solidFill>
+                  <a:srgbClr val="6B6B6B"/>
+                </a:solidFill>
+                <a:latin typeface="Malgun Gothic" pitchFamily="34" charset="0"/>
+                <a:ea typeface="Malgun Gothic" pitchFamily="34" charset="-122"/>
+                <a:cs typeface="Malgun Gothic" pitchFamily="34" charset="-120"/>
+              </a:rPr>
+              <a:t>›</a:t>
+            </a:r>
+            <a:endParaRPr lang="en-US" sz="1300" dirty="0"/>
+          </a:p>
+        </p:txBody>
+      </p:sp>
+      <p:sp>
+        <p:nvSpPr>
+          <p:cNvPr id="27" name="Text 25"/>
+          <p:cNvSpPr/>
+          <p:nvPr/>
+        </p:nvSpPr>
+        <p:spPr>
+          <a:xfrm>
+            <a:off x="9477756" y="4251960"/>
+            <a:ext cx="1207008" cy="457200"/>
+          </a:xfrm>
+          <a:prstGeom prst="roundRect">
+            <a:avLst>
+              <a:gd name="adj" fmla="val 50000"/>
+            </a:avLst>
+          </a:prstGeom>
+          <a:solidFill>
+            <a:srgbClr val="20232E"/>
+          </a:solidFill>
+          <a:ln w="12700">
+            <a:solidFill>
+              <a:srgbClr val="33384A"/>
+            </a:solidFill>
+          </a:ln>
+        </p:spPr>
+        <p:txBody>
+          <a:bodyPr wrap="square" rtlCol="0" anchor="ctr"/>
+          <a:lstStyle/>
+          <a:p>
+            <a:pPr algn="ctr" indent="0" marL="0">
+              <a:buNone/>
+            </a:pPr>
+            <a:r>
+              <a:rPr lang="en-US" sz="1150" b="1" dirty="0">
+                <a:solidFill>
+                  <a:srgbClr val="FECA0A"/>
+                </a:solidFill>
+                <a:latin typeface="Malgun Gothic" pitchFamily="34" charset="0"/>
+                <a:ea typeface="Malgun Gothic" pitchFamily="34" charset="-122"/>
+                <a:cs typeface="Malgun Gothic" pitchFamily="34" charset="-120"/>
+              </a:rPr>
+              <a:t>06 </a:t>
+            </a:r>
+            <a:pPr algn="ctr" indent="0" marL="0">
+              <a:buNone/>
+            </a:pPr>
+            <a:r>
+              <a:rPr lang="en-US" sz="1150" b="1" dirty="0">
+                <a:solidFill>
+                  <a:srgbClr val="FFFFFF"/>
+                </a:solidFill>
+                <a:latin typeface="Malgun Gothic" pitchFamily="34" charset="0"/>
+                <a:ea typeface="Malgun Gothic" pitchFamily="34" charset="-122"/>
+                <a:cs typeface="Malgun Gothic" pitchFamily="34" charset="-120"/>
+              </a:rPr>
+              <a:t>오픈</a:t>
+            </a:r>
+            <a:endParaRPr lang="en-US" sz="1150" dirty="0"/>
+          </a:p>
+        </p:txBody>
+      </p:sp>
+    </p:spTree>
+  </p:cSld>
+  <p:clrMapOvr>
+    <a:masterClrMapping/>
+  </p:clrMapOvr>
+</p:sld>
+</file>
+
+<file path=ppt/slides/slide14.xml><?xml version="1.0" encoding="utf-8"?>
+<p:sld xmlns:a="http://schemas.openxmlformats.org/drawingml/2006/main" xmlns:r="http://schemas.openxmlformats.org/officeDocument/2006/relationships" xmlns:p="http://schemas.openxmlformats.org/presentationml/2006/main">
+  <p:cSld name="Slide 14">
     <p:bg>
       <p:bgPr>
         <a:solidFill>
@@ -5293,9 +6435,9 @@
 </p:sld>
 </file>
 
-<file path=ppt/slides/slide14.xml><?xml version="1.0" encoding="utf-8"?>
+<file path=ppt/slides/slide15.xml><?xml version="1.0" encoding="utf-8"?>
 <p:sld xmlns:a="http://schemas.openxmlformats.org/drawingml/2006/main" xmlns:r="http://schemas.openxmlformats.org/officeDocument/2006/relationships" xmlns:p="http://schemas.openxmlformats.org/presentationml/2006/main">
-  <p:cSld name="Slide 14">
+  <p:cSld name="Slide 15">
     <p:bg>
       <p:bgPr>
         <a:solidFill>
